--- a/2024/2024-03-01-AI-Risk.pptx
+++ b/2024/2024-03-01-AI-Risk.pptx
@@ -944,7 +944,7 @@
         </p:nvSpPr>
         <p:spPr>
           <a:xfrm>
-            <a:off x="381300" y="685800"/>
+            <a:off x="381000" y="685800"/>
             <a:ext cx="6096000" cy="3429000"/>
           </a:xfrm>
           <a:custGeom>
@@ -1256,7 +1256,7 @@
         </p:nvSpPr>
         <p:spPr>
           <a:xfrm>
-            <a:off x="381300" y="685800"/>
+            <a:off x="381000" y="685800"/>
             <a:ext cx="6096000" cy="3429000"/>
           </a:xfrm>
           <a:custGeom>
@@ -7029,8 +7029,8 @@
         </p:nvSpPr>
         <p:spPr>
           <a:xfrm>
-            <a:off x="379375" y="678450"/>
-            <a:ext cx="8381400" cy="3786600"/>
+            <a:off x="379374" y="678450"/>
+            <a:ext cx="8382581" cy="3985676"/>
           </a:xfrm>
           <a:prstGeom prst="rect">
             <a:avLst/>
@@ -7064,7 +7064,7 @@
               <a:buNone/>
             </a:pPr>
             <a:r>
-              <a:rPr lang="en" sz="1300">
+              <a:rPr lang="en" sz="1300" dirty="0">
                 <a:latin typeface="Calibri"/>
                 <a:ea typeface="Calibri"/>
                 <a:cs typeface="Calibri"/>
@@ -7072,7 +7072,7 @@
               </a:rPr>
               <a:t>AI Risks Management Strategies</a:t>
             </a:r>
-            <a:endParaRPr sz="1300">
+            <a:endParaRPr sz="1300" dirty="0">
               <a:latin typeface="Calibri"/>
               <a:ea typeface="Calibri"/>
               <a:cs typeface="Calibri"/>
@@ -7092,7 +7092,7 @@
               <a:buChar char="●"/>
             </a:pPr>
             <a:r>
-              <a:rPr lang="en" sz="1300">
+              <a:rPr lang="en" sz="1300" dirty="0">
                 <a:latin typeface="Calibri"/>
                 <a:ea typeface="Calibri"/>
                 <a:cs typeface="Calibri"/>
@@ -7100,7 +7100,7 @@
               </a:rPr>
               <a:t>Governance Framework: Establish clear policies on LLM use</a:t>
             </a:r>
-            <a:endParaRPr sz="1300">
+            <a:endParaRPr sz="1300" dirty="0">
               <a:latin typeface="Calibri"/>
               <a:ea typeface="Calibri"/>
               <a:cs typeface="Calibri"/>
@@ -7120,7 +7120,7 @@
               <a:buChar char="●"/>
             </a:pPr>
             <a:r>
-              <a:rPr lang="en" sz="1300">
+              <a:rPr lang="en" sz="1300" dirty="0">
                 <a:latin typeface="Calibri"/>
                 <a:ea typeface="Calibri"/>
                 <a:cs typeface="Calibri"/>
@@ -7128,7 +7128,7 @@
               </a:rPr>
               <a:t>Risk Assessment: Identify risks related to specific LLM applications</a:t>
             </a:r>
-            <a:endParaRPr sz="1300">
+            <a:endParaRPr sz="1300" dirty="0">
               <a:latin typeface="Calibri"/>
               <a:ea typeface="Calibri"/>
               <a:cs typeface="Calibri"/>
@@ -7148,7 +7148,7 @@
               <a:buChar char="●"/>
             </a:pPr>
             <a:r>
-              <a:rPr lang="en" sz="1300">
+              <a:rPr lang="en" sz="1300" dirty="0">
                 <a:latin typeface="Calibri"/>
                 <a:ea typeface="Calibri"/>
                 <a:cs typeface="Calibri"/>
@@ -7157,7 +7157,7 @@
               <a:t>Implement fail-safes to prevent LLM from </a:t>
             </a:r>
             <a:r>
-              <a:rPr lang="en" sz="1300">
+              <a:rPr lang="en" sz="1300" dirty="0">
                 <a:solidFill>
                   <a:schemeClr val="dk1"/>
                 </a:solidFill>
@@ -7168,7 +7168,7 @@
               </a:rPr>
               <a:t>solely controlling actions that could cause significant harm</a:t>
             </a:r>
-            <a:endParaRPr sz="1300">
+            <a:endParaRPr sz="1300" dirty="0">
               <a:solidFill>
                 <a:schemeClr val="dk1"/>
               </a:solidFill>
@@ -7194,7 +7194,7 @@
               <a:buChar char="●"/>
             </a:pPr>
             <a:r>
-              <a:rPr lang="en" sz="1300">
+              <a:rPr lang="en" sz="1300" dirty="0">
                 <a:solidFill>
                   <a:schemeClr val="dk1"/>
                 </a:solidFill>
@@ -7205,7 +7205,7 @@
               </a:rPr>
               <a:t>If possible, frame the LLM's role as providing insights to human experts, not as a final decision-making authority</a:t>
             </a:r>
-            <a:endParaRPr sz="1300">
+            <a:endParaRPr sz="1300" dirty="0">
               <a:solidFill>
                 <a:schemeClr val="dk1"/>
               </a:solidFill>
@@ -7228,7 +7228,7 @@
               <a:buChar char="●"/>
             </a:pPr>
             <a:r>
-              <a:rPr lang="en" sz="1300">
+              <a:rPr lang="en" sz="1300" dirty="0">
                 <a:latin typeface="Calibri"/>
                 <a:ea typeface="Calibri"/>
                 <a:cs typeface="Calibri"/>
@@ -7236,7 +7236,7 @@
               </a:rPr>
               <a:t>Implement Controls: Utilize data de-identification, bias testing, human oversight (human-in-the-loop), and security measures (encryption, access control, secure data storage, regular penetration testing)</a:t>
             </a:r>
-            <a:endParaRPr sz="1300">
+            <a:endParaRPr sz="1300" dirty="0">
               <a:latin typeface="Calibri"/>
               <a:ea typeface="Calibri"/>
               <a:cs typeface="Calibri"/>
@@ -7256,7 +7256,7 @@
               <a:buChar char="●"/>
             </a:pPr>
             <a:r>
-              <a:rPr lang="en" sz="1300">
+              <a:rPr lang="en" sz="1300" dirty="0">
                 <a:latin typeface="Calibri"/>
                 <a:ea typeface="Calibri"/>
                 <a:cs typeface="Calibri"/>
@@ -7264,7 +7264,7 @@
               </a:rPr>
               <a:t>Monitoring &amp; Auditing: Track LLM outputs, periodically audit for issues; Content moderation; Fact-checking mechanisms; Human-in-the-loop review for sensitive topics; Guidelines for avoiding offensive/inappropriate responses</a:t>
             </a:r>
-            <a:endParaRPr sz="1300">
+            <a:endParaRPr sz="1300" dirty="0">
               <a:latin typeface="Calibri"/>
               <a:ea typeface="Calibri"/>
               <a:cs typeface="Calibri"/>
@@ -7284,7 +7284,7 @@
               <a:buChar char="●"/>
             </a:pPr>
             <a:r>
-              <a:rPr lang="en" sz="1300">
+              <a:rPr lang="en" sz="1300" dirty="0">
                 <a:latin typeface="Calibri"/>
                 <a:ea typeface="Calibri"/>
                 <a:cs typeface="Calibri"/>
@@ -7292,7 +7292,7 @@
               </a:rPr>
               <a:t>Technical: Stress testing; Redundancy &amp; failover plans; 24/7 monitoring (if critical to your business)</a:t>
             </a:r>
-            <a:endParaRPr sz="1300">
+            <a:endParaRPr sz="1300" dirty="0">
               <a:latin typeface="Calibri"/>
               <a:ea typeface="Calibri"/>
               <a:cs typeface="Calibri"/>
@@ -7312,7 +7312,7 @@
               <a:buChar char="●"/>
             </a:pPr>
             <a:r>
-              <a:rPr lang="en" sz="1300">
+              <a:rPr lang="en" sz="1300" dirty="0">
                 <a:latin typeface="Calibri"/>
                 <a:ea typeface="Calibri"/>
                 <a:cs typeface="Calibri"/>
@@ -7320,7 +7320,7 @@
               </a:rPr>
               <a:t>Training: Educate employees on LLM capabilities and responsible use</a:t>
             </a:r>
-            <a:endParaRPr sz="1300">
+            <a:endParaRPr sz="1300" dirty="0">
               <a:latin typeface="Calibri"/>
               <a:ea typeface="Calibri"/>
               <a:cs typeface="Calibri"/>
@@ -7340,7 +7340,7 @@
               <a:buChar char="●"/>
             </a:pPr>
             <a:r>
-              <a:rPr lang="en" sz="1300">
+              <a:rPr lang="en" sz="1300" dirty="0">
                 <a:latin typeface="Calibri"/>
                 <a:ea typeface="Calibri"/>
                 <a:cs typeface="Calibri"/>
@@ -7349,7 +7349,7 @@
               <a:t>Legal: which laws would apply? (</a:t>
             </a:r>
             <a:r>
-              <a:rPr lang="en" sz="1300" b="1">
+              <a:rPr lang="en" sz="1300" b="1" dirty="0">
                 <a:solidFill>
                   <a:srgbClr val="FF0000"/>
                 </a:solidFill>
@@ -7361,7 +7361,7 @@
               <a:t>GDPR</a:t>
             </a:r>
             <a:r>
-              <a:rPr lang="en" sz="1300">
+              <a:rPr lang="en" sz="1300" dirty="0">
                 <a:latin typeface="Calibri"/>
                 <a:ea typeface="Calibri"/>
                 <a:cs typeface="Calibri"/>
@@ -7370,7 +7370,7 @@
               <a:t>, </a:t>
             </a:r>
             <a:r>
-              <a:rPr lang="en" sz="1300" b="1">
+              <a:rPr lang="en" sz="1300" b="1" dirty="0">
                 <a:solidFill>
                   <a:srgbClr val="FF0000"/>
                 </a:solidFill>
@@ -7382,7 +7382,7 @@
               <a:t>CCPA</a:t>
             </a:r>
             <a:r>
-              <a:rPr lang="en" sz="1300">
+              <a:rPr lang="en" sz="1300" dirty="0">
                 <a:latin typeface="Calibri"/>
                 <a:ea typeface="Calibri"/>
                 <a:cs typeface="Calibri"/>
@@ -7391,7 +7391,7 @@
               <a:t>, etc.); Legal review of chatbot scripts and data collection; Clear privacy notices to users; Mechanisms for data subject rights (access, deletion)</a:t>
             </a:r>
             <a:br>
-              <a:rPr lang="en" sz="1300">
+              <a:rPr lang="en" sz="1300" dirty="0">
                 <a:latin typeface="Calibri"/>
                 <a:ea typeface="Calibri"/>
                 <a:cs typeface="Calibri"/>
@@ -7399,7 +7399,7 @@
               </a:rPr>
             </a:br>
             <a:r>
-              <a:rPr lang="en" sz="1300" b="1">
+              <a:rPr lang="en" sz="1300" b="1" dirty="0">
                 <a:solidFill>
                   <a:srgbClr val="FF0000"/>
                 </a:solidFill>
@@ -7411,7 +7411,7 @@
               <a:t>GDPR</a:t>
             </a:r>
             <a:r>
-              <a:rPr lang="en" sz="1300">
+              <a:rPr lang="en" sz="1300" dirty="0">
                 <a:latin typeface="Calibri"/>
                 <a:ea typeface="Calibri"/>
                 <a:cs typeface="Calibri"/>
@@ -7420,7 +7420,7 @@
               <a:t> = General Data Protection Regulation - </a:t>
             </a:r>
             <a:r>
-              <a:rPr lang="en" sz="1300" u="sng">
+              <a:rPr lang="en" sz="1300" u="sng" dirty="0">
                 <a:solidFill>
                   <a:schemeClr val="hlink"/>
                 </a:solidFill>
@@ -7433,7 +7433,7 @@
               <a:t>https://gdpr-info.eu</a:t>
             </a:r>
             <a:r>
-              <a:rPr lang="en" sz="1300">
+              <a:rPr lang="en" sz="1300" dirty="0">
                 <a:latin typeface="Calibri"/>
                 <a:ea typeface="Calibri"/>
                 <a:cs typeface="Calibri"/>
@@ -7442,7 +7442,7 @@
               <a:t> </a:t>
             </a:r>
             <a:br>
-              <a:rPr lang="en" sz="1300">
+              <a:rPr lang="en" sz="1300" dirty="0">
                 <a:latin typeface="Calibri"/>
                 <a:ea typeface="Calibri"/>
                 <a:cs typeface="Calibri"/>
@@ -7450,7 +7450,7 @@
               </a:rPr>
             </a:br>
             <a:r>
-              <a:rPr lang="en" sz="1300" b="1">
+              <a:rPr lang="en" sz="1300" b="1" dirty="0">
                 <a:solidFill>
                   <a:srgbClr val="FF0000"/>
                 </a:solidFill>
@@ -7462,7 +7462,7 @@
               <a:t>CCPA</a:t>
             </a:r>
             <a:r>
-              <a:rPr lang="en" sz="1300">
+              <a:rPr lang="en" sz="1300" dirty="0">
                 <a:latin typeface="Calibri"/>
                 <a:ea typeface="Calibri"/>
                 <a:cs typeface="Calibri"/>
@@ -7471,7 +7471,7 @@
               <a:t> = California Consumer Privacy Act - </a:t>
             </a:r>
             <a:r>
-              <a:rPr lang="en" sz="1300" u="sng">
+              <a:rPr lang="en" sz="1300" u="sng" dirty="0">
                 <a:solidFill>
                   <a:schemeClr val="hlink"/>
                 </a:solidFill>
@@ -7484,7 +7484,7 @@
               <a:t>https://oag.ca.gov/privacy/ccpa</a:t>
             </a:r>
             <a:r>
-              <a:rPr lang="en" sz="1300">
+              <a:rPr lang="en" sz="1300" dirty="0">
                 <a:latin typeface="Calibri"/>
                 <a:ea typeface="Calibri"/>
                 <a:cs typeface="Calibri"/>
@@ -7492,7 +7492,7 @@
               </a:rPr>
               <a:t> </a:t>
             </a:r>
-            <a:endParaRPr sz="1300">
+            <a:endParaRPr sz="1300" dirty="0">
               <a:latin typeface="Calibri"/>
               <a:ea typeface="Calibri"/>
               <a:cs typeface="Calibri"/>
@@ -7512,7 +7512,7 @@
               <a:buChar char="●"/>
             </a:pPr>
             <a:r>
-              <a:rPr lang="en" sz="1300">
+              <a:rPr lang="en" sz="1300" dirty="0">
                 <a:latin typeface="Calibri"/>
                 <a:ea typeface="Calibri"/>
                 <a:cs typeface="Calibri"/>
@@ -7520,7 +7520,7 @@
               </a:rPr>
               <a:t>Malicious scenarios: Adversarial testing (have someone try to "break" it); Insurance assessment; Buy specialized insurance for AI-related risks</a:t>
             </a:r>
-            <a:endParaRPr sz="1300">
+            <a:endParaRPr sz="1300" dirty="0">
               <a:latin typeface="Calibri"/>
               <a:ea typeface="Calibri"/>
               <a:cs typeface="Calibri"/>
@@ -7540,7 +7540,7 @@
               <a:buChar char="●"/>
             </a:pPr>
             <a:r>
-              <a:rPr lang="en" sz="1300">
+              <a:rPr lang="en" sz="1300" dirty="0">
                 <a:latin typeface="Calibri"/>
                 <a:ea typeface="Calibri"/>
                 <a:cs typeface="Calibri"/>
@@ -7548,7 +7548,7 @@
               </a:rPr>
               <a:t>Rigorously test the LLM in various scenarios</a:t>
             </a:r>
-            <a:endParaRPr sz="1300">
+            <a:endParaRPr sz="1300" dirty="0">
               <a:latin typeface="Calibri"/>
               <a:ea typeface="Calibri"/>
               <a:cs typeface="Calibri"/>
@@ -8425,20 +8425,7 @@
                 <a:sym typeface="Calibri"/>
                 <a:hlinkClick r:id="rId11"/>
               </a:rPr>
-              <a:t>h</a:t>
-            </a:r>
-            <a:r>
-              <a:rPr lang="en" sz="1300" u="sng">
-                <a:solidFill>
-                  <a:schemeClr val="hlink"/>
-                </a:solidFill>
-                <a:latin typeface="Calibri"/>
-                <a:ea typeface="Calibri"/>
-                <a:cs typeface="Calibri"/>
-                <a:sym typeface="Calibri"/>
-                <a:hlinkClick r:id="rId11"/>
-              </a:rPr>
-              <a:t>ttps://www.nist.gov/itl/ai-risk-management-framework</a:t>
+              <a:t>https://www.nist.gov/itl/ai-risk-management-framework</a:t>
             </a:r>
             <a:endParaRPr sz="1300">
               <a:latin typeface="Calibri"/>
@@ -9053,7 +9040,7 @@
         </p:nvGraphicFramePr>
         <p:xfrm>
           <a:off x="244625" y="534213"/>
-          <a:ext cx="3000000" cy="3000000"/>
+          <a:ext cx="8654750" cy="4385707"/>
         </p:xfrm>
         <a:graphic>
           <a:graphicData uri="http://schemas.openxmlformats.org/drawingml/2006/table">

--- a/2024/2024-03-01-AI-Risk.pptx
+++ b/2024/2024-03-01-AI-Risk.pptx
@@ -1,11 +1,11 @@
 
 <file path=ppt/presentation.xml><?xml version="1.0" encoding="utf-8"?>
-<p:presentation xmlns:a="http://schemas.openxmlformats.org/drawingml/2006/main" xmlns:r="http://schemas.openxmlformats.org/officeDocument/2006/relationships" xmlns:p="http://schemas.openxmlformats.org/presentationml/2006/main" strictFirstAndLastChars="0" saveSubsetFonts="1" autoCompressPictures="0">
+<p:presentation xmlns:a="http://schemas.openxmlformats.org/drawingml/2006/main" xmlns:r="http://schemas.openxmlformats.org/officeDocument/2006/relationships" xmlns:p="http://schemas.openxmlformats.org/presentationml/2006/main" strictFirstAndLastChars="0" saveSubsetFonts="1">
   <p:sldMasterIdLst>
     <p:sldMasterId id="2147483659" r:id="rId1"/>
   </p:sldMasterIdLst>
   <p:notesMasterIdLst>
-    <p:notesMasterId r:id="rId9"/>
+    <p:notesMasterId r:id="rId11"/>
   </p:notesMasterIdLst>
   <p:sldIdLst>
     <p:sldId id="256" r:id="rId2"/>
@@ -14,7 +14,9 @@
     <p:sldId id="259" r:id="rId5"/>
     <p:sldId id="260" r:id="rId6"/>
     <p:sldId id="261" r:id="rId7"/>
-    <p:sldId id="262" r:id="rId8"/>
+    <p:sldId id="264" r:id="rId8"/>
+    <p:sldId id="265" r:id="rId9"/>
+    <p:sldId id="262" r:id="rId10"/>
   </p:sldIdLst>
   <p:sldSz cx="9144000" cy="5143500" type="screen16x9"/>
   <p:notesSz cx="6858000" cy="9144000"/>
@@ -1332,6 +1334,224 @@
 </file>
 
 <file path=ppt/notesSlides/notesSlide7.xml><?xml version="1.0" encoding="utf-8"?>
+<p:notes xmlns:a="http://schemas.openxmlformats.org/drawingml/2006/main" xmlns:r="http://schemas.openxmlformats.org/officeDocument/2006/relationships" xmlns:p="http://schemas.openxmlformats.org/presentationml/2006/main" showMasterSp="0" showMasterPhAnim="0">
+  <p:cSld>
+    <p:spTree>
+      <p:nvGrpSpPr>
+        <p:cNvPr id="1" name="Shape 57"/>
+        <p:cNvGrpSpPr/>
+        <p:nvPr/>
+      </p:nvGrpSpPr>
+      <p:grpSpPr>
+        <a:xfrm>
+          <a:off x="0" y="0"/>
+          <a:ext cx="0" cy="0"/>
+          <a:chOff x="0" y="0"/>
+          <a:chExt cx="0" cy="0"/>
+        </a:xfrm>
+      </p:grpSpPr>
+      <p:sp>
+        <p:nvSpPr>
+          <p:cNvPr id="58" name="Google Shape;58;g2bcfa8c8ef8_0_0:notes"/>
+          <p:cNvSpPr>
+            <a:spLocks noGrp="1" noRot="1" noChangeAspect="1"/>
+          </p:cNvSpPr>
+          <p:nvPr>
+            <p:ph type="sldImg" idx="2"/>
+          </p:nvPr>
+        </p:nvSpPr>
+        <p:spPr>
+          <a:xfrm>
+            <a:off x="381000" y="685800"/>
+            <a:ext cx="6096000" cy="3429000"/>
+          </a:xfrm>
+          <a:custGeom>
+            <a:avLst/>
+            <a:gdLst/>
+            <a:ahLst/>
+            <a:cxnLst/>
+            <a:rect l="l" t="t" r="r" b="b"/>
+            <a:pathLst>
+              <a:path w="120000" h="120000" extrusionOk="0">
+                <a:moveTo>
+                  <a:pt x="0" y="0"/>
+                </a:moveTo>
+                <a:lnTo>
+                  <a:pt x="120000" y="0"/>
+                </a:lnTo>
+                <a:lnTo>
+                  <a:pt x="120000" y="120000"/>
+                </a:lnTo>
+                <a:lnTo>
+                  <a:pt x="0" y="120000"/>
+                </a:lnTo>
+                <a:close/>
+              </a:path>
+            </a:pathLst>
+          </a:custGeom>
+        </p:spPr>
+      </p:sp>
+      <p:sp>
+        <p:nvSpPr>
+          <p:cNvPr id="59" name="Google Shape;59;g2bcfa8c8ef8_0_0:notes"/>
+          <p:cNvSpPr txBox="1">
+            <a:spLocks noGrp="1"/>
+          </p:cNvSpPr>
+          <p:nvPr>
+            <p:ph type="body" idx="1"/>
+          </p:nvPr>
+        </p:nvSpPr>
+        <p:spPr>
+          <a:xfrm>
+            <a:off x="685800" y="4343400"/>
+            <a:ext cx="5486400" cy="4114800"/>
+          </a:xfrm>
+          <a:prstGeom prst="rect">
+            <a:avLst/>
+          </a:prstGeom>
+        </p:spPr>
+        <p:txBody>
+          <a:bodyPr spcFirstLastPara="1" wrap="square" lIns="91425" tIns="91425" rIns="91425" bIns="91425" anchor="t" anchorCtr="0">
+            <a:noAutofit/>
+          </a:bodyPr>
+          <a:lstStyle/>
+          <a:p>
+            <a:pPr marL="0" lvl="0" indent="0" algn="l" rtl="0">
+              <a:spcBef>
+                <a:spcPts val="0"/>
+              </a:spcBef>
+              <a:spcAft>
+                <a:spcPts val="0"/>
+              </a:spcAft>
+              <a:buNone/>
+            </a:pPr>
+            <a:endParaRPr/>
+          </a:p>
+        </p:txBody>
+      </p:sp>
+    </p:spTree>
+    <p:extLst>
+      <p:ext uri="{BB962C8B-B14F-4D97-AF65-F5344CB8AC3E}">
+        <p14:creationId xmlns:p14="http://schemas.microsoft.com/office/powerpoint/2010/main" val="1096779016"/>
+      </p:ext>
+    </p:extLst>
+  </p:cSld>
+  <p:clrMapOvr>
+    <a:masterClrMapping/>
+  </p:clrMapOvr>
+</p:notes>
+</file>
+
+<file path=ppt/notesSlides/notesSlide8.xml><?xml version="1.0" encoding="utf-8"?>
+<p:notes xmlns:a="http://schemas.openxmlformats.org/drawingml/2006/main" xmlns:r="http://schemas.openxmlformats.org/officeDocument/2006/relationships" xmlns:p="http://schemas.openxmlformats.org/presentationml/2006/main" showMasterSp="0" showMasterPhAnim="0">
+  <p:cSld>
+    <p:spTree>
+      <p:nvGrpSpPr>
+        <p:cNvPr id="1" name="Shape 57"/>
+        <p:cNvGrpSpPr/>
+        <p:nvPr/>
+      </p:nvGrpSpPr>
+      <p:grpSpPr>
+        <a:xfrm>
+          <a:off x="0" y="0"/>
+          <a:ext cx="0" cy="0"/>
+          <a:chOff x="0" y="0"/>
+          <a:chExt cx="0" cy="0"/>
+        </a:xfrm>
+      </p:grpSpPr>
+      <p:sp>
+        <p:nvSpPr>
+          <p:cNvPr id="58" name="Google Shape;58;g2bcfa8c8ef8_0_0:notes"/>
+          <p:cNvSpPr>
+            <a:spLocks noGrp="1" noRot="1" noChangeAspect="1"/>
+          </p:cNvSpPr>
+          <p:nvPr>
+            <p:ph type="sldImg" idx="2"/>
+          </p:nvPr>
+        </p:nvSpPr>
+        <p:spPr>
+          <a:xfrm>
+            <a:off x="381000" y="685800"/>
+            <a:ext cx="6096000" cy="3429000"/>
+          </a:xfrm>
+          <a:custGeom>
+            <a:avLst/>
+            <a:gdLst/>
+            <a:ahLst/>
+            <a:cxnLst/>
+            <a:rect l="l" t="t" r="r" b="b"/>
+            <a:pathLst>
+              <a:path w="120000" h="120000" extrusionOk="0">
+                <a:moveTo>
+                  <a:pt x="0" y="0"/>
+                </a:moveTo>
+                <a:lnTo>
+                  <a:pt x="120000" y="0"/>
+                </a:lnTo>
+                <a:lnTo>
+                  <a:pt x="120000" y="120000"/>
+                </a:lnTo>
+                <a:lnTo>
+                  <a:pt x="0" y="120000"/>
+                </a:lnTo>
+                <a:close/>
+              </a:path>
+            </a:pathLst>
+          </a:custGeom>
+        </p:spPr>
+      </p:sp>
+      <p:sp>
+        <p:nvSpPr>
+          <p:cNvPr id="59" name="Google Shape;59;g2bcfa8c8ef8_0_0:notes"/>
+          <p:cNvSpPr txBox="1">
+            <a:spLocks noGrp="1"/>
+          </p:cNvSpPr>
+          <p:nvPr>
+            <p:ph type="body" idx="1"/>
+          </p:nvPr>
+        </p:nvSpPr>
+        <p:spPr>
+          <a:xfrm>
+            <a:off x="685800" y="4343400"/>
+            <a:ext cx="5486400" cy="4114800"/>
+          </a:xfrm>
+          <a:prstGeom prst="rect">
+            <a:avLst/>
+          </a:prstGeom>
+        </p:spPr>
+        <p:txBody>
+          <a:bodyPr spcFirstLastPara="1" wrap="square" lIns="91425" tIns="91425" rIns="91425" bIns="91425" anchor="t" anchorCtr="0">
+            <a:noAutofit/>
+          </a:bodyPr>
+          <a:lstStyle/>
+          <a:p>
+            <a:pPr marL="0" lvl="0" indent="0" algn="l" rtl="0">
+              <a:spcBef>
+                <a:spcPts val="0"/>
+              </a:spcBef>
+              <a:spcAft>
+                <a:spcPts val="0"/>
+              </a:spcAft>
+              <a:buNone/>
+            </a:pPr>
+            <a:endParaRPr/>
+          </a:p>
+        </p:txBody>
+      </p:sp>
+    </p:spTree>
+    <p:extLst>
+      <p:ext uri="{BB962C8B-B14F-4D97-AF65-F5344CB8AC3E}">
+        <p14:creationId xmlns:p14="http://schemas.microsoft.com/office/powerpoint/2010/main" val="1870193943"/>
+      </p:ext>
+    </p:extLst>
+  </p:cSld>
+  <p:clrMapOvr>
+    <a:masterClrMapping/>
+  </p:clrMapOvr>
+</p:notes>
+</file>
+
+<file path=ppt/notesSlides/notesSlide9.xml><?xml version="1.0" encoding="utf-8"?>
 <p:notes xmlns:a="http://schemas.openxmlformats.org/drawingml/2006/main" xmlns:r="http://schemas.openxmlformats.org/officeDocument/2006/relationships" xmlns:p="http://schemas.openxmlformats.org/presentationml/2006/main" showMasterSp="0" showMasterPhAnim="0">
   <p:cSld>
     <p:spTree>
@@ -7030,7 +7250,7 @@
         <p:spPr>
           <a:xfrm>
             <a:off x="379374" y="678450"/>
-            <a:ext cx="8382581" cy="3985676"/>
+            <a:ext cx="8382581" cy="4185731"/>
           </a:xfrm>
           <a:prstGeom prst="rect">
             <a:avLst/>
@@ -7388,6 +7608,27 @@
                 <a:cs typeface="Calibri"/>
                 <a:sym typeface="Calibri"/>
               </a:rPr>
+              <a:t>, </a:t>
+            </a:r>
+            <a:r>
+              <a:rPr lang="en-US" sz="1300" b="1" dirty="0">
+                <a:solidFill>
+                  <a:srgbClr val="FF0000"/>
+                </a:solidFill>
+                <a:latin typeface="Calibri"/>
+                <a:ea typeface="Calibri"/>
+                <a:cs typeface="Calibri"/>
+                <a:sym typeface="Calibri"/>
+              </a:rPr>
+              <a:t>HIPAA</a:t>
+            </a:r>
+            <a:r>
+              <a:rPr lang="en" sz="1300" dirty="0">
+                <a:latin typeface="Calibri"/>
+                <a:ea typeface="Calibri"/>
+                <a:cs typeface="Calibri"/>
+                <a:sym typeface="Calibri"/>
+              </a:rPr>
               <a:t>, etc.); Legal review of chatbot scripts and data collection; Clear privacy notices to users; Mechanisms for data subject rights (access, deletion)</a:t>
             </a:r>
             <a:br>
@@ -7485,6 +7726,54 @@
             </a:r>
             <a:r>
               <a:rPr lang="en" sz="1300" dirty="0">
+                <a:latin typeface="Calibri"/>
+                <a:ea typeface="Calibri"/>
+                <a:cs typeface="Calibri"/>
+                <a:sym typeface="Calibri"/>
+              </a:rPr>
+              <a:t> </a:t>
+            </a:r>
+            <a:br>
+              <a:rPr lang="en" sz="1300" dirty="0">
+                <a:latin typeface="Calibri"/>
+                <a:ea typeface="Calibri"/>
+                <a:cs typeface="Calibri"/>
+                <a:sym typeface="Calibri"/>
+              </a:rPr>
+            </a:br>
+            <a:r>
+              <a:rPr lang="en-US" sz="1300" b="1" dirty="0">
+                <a:solidFill>
+                  <a:srgbClr val="FF0000"/>
+                </a:solidFill>
+                <a:latin typeface="Calibri"/>
+                <a:ea typeface="Calibri"/>
+                <a:cs typeface="Calibri"/>
+                <a:sym typeface="Calibri"/>
+              </a:rPr>
+              <a:t>HIPAA</a:t>
+            </a:r>
+            <a:r>
+              <a:rPr lang="en-US" sz="1300" dirty="0">
+                <a:latin typeface="Calibri"/>
+                <a:ea typeface="Calibri"/>
+                <a:cs typeface="Calibri"/>
+                <a:sym typeface="Calibri"/>
+              </a:rPr>
+              <a:t> = Health Insurance Portability and Accountability Act of 1996 - </a:t>
+            </a:r>
+            <a:r>
+              <a:rPr lang="en-US" sz="1300" dirty="0">
+                <a:latin typeface="Calibri"/>
+                <a:ea typeface="Calibri"/>
+                <a:cs typeface="Calibri"/>
+                <a:sym typeface="Calibri"/>
+                <a:hlinkClick r:id="rId5"/>
+              </a:rPr>
+              <a:t>https://www.hhs.gov/hipaa</a:t>
+            </a:r>
+            <a:r>
+              <a:rPr lang="en-US" sz="1300" dirty="0">
                 <a:latin typeface="Calibri"/>
                 <a:ea typeface="Calibri"/>
                 <a:cs typeface="Calibri"/>
@@ -12390,6 +12679,1049 @@
 </file>
 
 <file path=ppt/slides/slide7.xml><?xml version="1.0" encoding="utf-8"?>
+<p:sld xmlns:a="http://schemas.openxmlformats.org/drawingml/2006/main" xmlns:r="http://schemas.openxmlformats.org/officeDocument/2006/relationships" xmlns:p="http://schemas.openxmlformats.org/presentationml/2006/main">
+  <p:cSld>
+    <p:spTree>
+      <p:nvGrpSpPr>
+        <p:cNvPr id="1" name="Shape 60"/>
+        <p:cNvGrpSpPr/>
+        <p:nvPr/>
+      </p:nvGrpSpPr>
+      <p:grpSpPr>
+        <a:xfrm>
+          <a:off x="0" y="0"/>
+          <a:ext cx="0" cy="0"/>
+          <a:chOff x="0" y="0"/>
+          <a:chExt cx="0" cy="0"/>
+        </a:xfrm>
+      </p:grpSpPr>
+      <p:sp>
+        <p:nvSpPr>
+          <p:cNvPr id="61" name="Google Shape;61;p14"/>
+          <p:cNvSpPr txBox="1"/>
+          <p:nvPr/>
+        </p:nvSpPr>
+        <p:spPr>
+          <a:xfrm>
+            <a:off x="72300" y="0"/>
+            <a:ext cx="4932000" cy="326205"/>
+          </a:xfrm>
+          <a:prstGeom prst="rect">
+            <a:avLst/>
+          </a:prstGeom>
+          <a:noFill/>
+          <a:ln>
+            <a:noFill/>
+          </a:ln>
+        </p:spPr>
+        <p:txBody>
+          <a:bodyPr spcFirstLastPara="1" wrap="square" lIns="9125" tIns="9125" rIns="9125" bIns="9125" anchor="t" anchorCtr="0">
+            <a:spAutoFit/>
+          </a:bodyPr>
+          <a:lstStyle/>
+          <a:p>
+            <a:pPr marL="0" lvl="0" indent="0" algn="l" rtl="0">
+              <a:spcBef>
+                <a:spcPts val="0"/>
+              </a:spcBef>
+              <a:spcAft>
+                <a:spcPts val="0"/>
+              </a:spcAft>
+              <a:buNone/>
+            </a:pPr>
+            <a:r>
+              <a:rPr lang="en-US" sz="2000" b="1" dirty="0">
+                <a:solidFill>
+                  <a:schemeClr val="dk1"/>
+                </a:solidFill>
+                <a:latin typeface="Calibri"/>
+                <a:ea typeface="Calibri"/>
+                <a:cs typeface="Calibri"/>
+                <a:sym typeface="Calibri"/>
+              </a:rPr>
+              <a:t>Microsoft-365 Copilot Risk Mitigation</a:t>
+            </a:r>
+          </a:p>
+        </p:txBody>
+      </p:sp>
+      <p:sp>
+        <p:nvSpPr>
+          <p:cNvPr id="62" name="Google Shape;62;p14"/>
+          <p:cNvSpPr txBox="1"/>
+          <p:nvPr/>
+        </p:nvSpPr>
+        <p:spPr>
+          <a:xfrm>
+            <a:off x="258200" y="508575"/>
+            <a:ext cx="4256650" cy="2785348"/>
+          </a:xfrm>
+          <a:prstGeom prst="rect">
+            <a:avLst/>
+          </a:prstGeom>
+          <a:solidFill>
+            <a:srgbClr val="FFF2CC"/>
+          </a:solidFill>
+          <a:ln w="9525" cap="flat" cmpd="sng">
+            <a:solidFill>
+              <a:srgbClr val="FF0000"/>
+            </a:solidFill>
+            <a:prstDash val="solid"/>
+            <a:round/>
+            <a:headEnd type="none" w="sm" len="sm"/>
+            <a:tailEnd type="none" w="sm" len="sm"/>
+          </a:ln>
+        </p:spPr>
+        <p:txBody>
+          <a:bodyPr spcFirstLastPara="1" wrap="square" lIns="91425" tIns="91425" rIns="91425" bIns="91425" anchor="t" anchorCtr="0">
+            <a:spAutoFit/>
+          </a:bodyPr>
+          <a:lstStyle/>
+          <a:p>
+            <a:pPr marL="0" lvl="0" indent="0" algn="l" rtl="0">
+              <a:spcBef>
+                <a:spcPts val="0"/>
+              </a:spcBef>
+              <a:spcAft>
+                <a:spcPts val="0"/>
+              </a:spcAft>
+              <a:buNone/>
+            </a:pPr>
+            <a:r>
+              <a:rPr lang="en-US" sz="1300" b="1" dirty="0">
+                <a:solidFill>
+                  <a:srgbClr val="FF0000"/>
+                </a:solidFill>
+                <a:latin typeface="Calibri"/>
+                <a:ea typeface="Calibri"/>
+                <a:cs typeface="Calibri"/>
+                <a:sym typeface="Calibri"/>
+              </a:rPr>
+              <a:t>Microsoft Graph </a:t>
+            </a:r>
+          </a:p>
+          <a:p>
+            <a:pPr marL="0" lvl="0" indent="0" algn="l" rtl="0">
+              <a:spcBef>
+                <a:spcPts val="0"/>
+              </a:spcBef>
+              <a:spcAft>
+                <a:spcPts val="0"/>
+              </a:spcAft>
+              <a:buNone/>
+            </a:pPr>
+            <a:r>
+              <a:rPr lang="en-US" sz="1300" dirty="0">
+                <a:latin typeface="Calibri"/>
+                <a:ea typeface="Calibri"/>
+                <a:cs typeface="Calibri"/>
+                <a:sym typeface="Calibri"/>
+              </a:rPr>
+              <a:t>- </a:t>
+            </a:r>
+            <a:r>
+              <a:rPr lang="en-US" sz="1300" dirty="0">
+                <a:latin typeface="Calibri"/>
+                <a:ea typeface="Calibri"/>
+                <a:cs typeface="Calibri"/>
+                <a:sym typeface="Calibri"/>
+                <a:hlinkClick r:id="rId3"/>
+              </a:rPr>
+              <a:t>https://developer.microsoft.com/en-us/graph</a:t>
+            </a:r>
+            <a:r>
+              <a:rPr lang="en-US" sz="1300" dirty="0">
+                <a:latin typeface="Calibri"/>
+                <a:ea typeface="Calibri"/>
+                <a:cs typeface="Calibri"/>
+                <a:sym typeface="Calibri"/>
+              </a:rPr>
+              <a:t> </a:t>
+            </a:r>
+          </a:p>
+          <a:p>
+            <a:pPr marL="0" lvl="0" indent="0" algn="l" rtl="0">
+              <a:spcBef>
+                <a:spcPts val="0"/>
+              </a:spcBef>
+              <a:spcAft>
+                <a:spcPts val="0"/>
+              </a:spcAft>
+              <a:buNone/>
+            </a:pPr>
+            <a:r>
+              <a:rPr lang="en-US" sz="1300" dirty="0">
+                <a:latin typeface="Calibri"/>
+                <a:ea typeface="Calibri"/>
+                <a:cs typeface="Calibri"/>
+                <a:sym typeface="Calibri"/>
+              </a:rPr>
+              <a:t>- </a:t>
+            </a:r>
+            <a:r>
+              <a:rPr lang="en-US" sz="1300" dirty="0">
+                <a:latin typeface="Calibri"/>
+                <a:ea typeface="Calibri"/>
+                <a:cs typeface="Calibri"/>
+                <a:sym typeface="Calibri"/>
+                <a:hlinkClick r:id="rId4"/>
+              </a:rPr>
+              <a:t>https://learn.microsoft.com/en-us/graph/overview</a:t>
+            </a:r>
+            <a:r>
+              <a:rPr lang="en-US" sz="1300" dirty="0">
+                <a:latin typeface="Calibri"/>
+                <a:ea typeface="Calibri"/>
+                <a:cs typeface="Calibri"/>
+                <a:sym typeface="Calibri"/>
+              </a:rPr>
+              <a:t> </a:t>
+            </a:r>
+          </a:p>
+          <a:p>
+            <a:pPr marL="0" lvl="0" indent="0" algn="l" rtl="0">
+              <a:spcBef>
+                <a:spcPts val="0"/>
+              </a:spcBef>
+              <a:spcAft>
+                <a:spcPts val="0"/>
+              </a:spcAft>
+              <a:buNone/>
+            </a:pPr>
+            <a:r>
+              <a:rPr lang="en-US" sz="1300" dirty="0">
+                <a:latin typeface="Calibri"/>
+                <a:ea typeface="Calibri"/>
+                <a:cs typeface="Calibri"/>
+                <a:sym typeface="Calibri"/>
+              </a:rPr>
+              <a:t>Microsoft Graph is the </a:t>
+            </a:r>
+            <a:r>
+              <a:rPr lang="en-US" sz="1300" dirty="0" err="1">
+                <a:latin typeface="Calibri"/>
+                <a:ea typeface="Calibri"/>
+                <a:cs typeface="Calibri"/>
+                <a:sym typeface="Calibri"/>
+              </a:rPr>
+              <a:t>the</a:t>
+            </a:r>
+            <a:r>
+              <a:rPr lang="en-US" sz="1300" dirty="0">
+                <a:latin typeface="Calibri"/>
+                <a:ea typeface="Calibri"/>
+                <a:cs typeface="Calibri"/>
+                <a:sym typeface="Calibri"/>
+              </a:rPr>
+              <a:t> gateway to Microsoft-365 data.</a:t>
+            </a:r>
+          </a:p>
+          <a:p>
+            <a:pPr marL="0" lvl="0" indent="0" algn="l" rtl="0">
+              <a:spcBef>
+                <a:spcPts val="0"/>
+              </a:spcBef>
+              <a:spcAft>
+                <a:spcPts val="0"/>
+              </a:spcAft>
+              <a:buNone/>
+            </a:pPr>
+            <a:r>
+              <a:rPr lang="en-US" sz="1300" dirty="0">
+                <a:latin typeface="Calibri"/>
+                <a:ea typeface="Calibri"/>
+                <a:cs typeface="Calibri"/>
+                <a:sym typeface="Calibri"/>
+              </a:rPr>
+              <a:t>It is an API endpoint</a:t>
+            </a:r>
+          </a:p>
+          <a:p>
+            <a:pPr marL="0" lvl="0" indent="0" algn="l" rtl="0">
+              <a:spcBef>
+                <a:spcPts val="0"/>
+              </a:spcBef>
+              <a:spcAft>
+                <a:spcPts val="0"/>
+              </a:spcAft>
+              <a:buNone/>
+            </a:pPr>
+            <a:r>
+              <a:rPr lang="en-US" sz="1300" dirty="0">
+                <a:latin typeface="Calibri"/>
+                <a:ea typeface="Calibri"/>
+                <a:cs typeface="Calibri"/>
+                <a:sym typeface="Calibri"/>
+              </a:rPr>
+              <a:t>Data comes from Outlook, OneDrive, Teams, SharePoint, OneNote, excel, Azure Active Directory, and more ...</a:t>
+            </a:r>
+          </a:p>
+          <a:p>
+            <a:pPr marL="0" lvl="0" indent="0" algn="l" rtl="0">
+              <a:spcBef>
+                <a:spcPts val="0"/>
+              </a:spcBef>
+              <a:spcAft>
+                <a:spcPts val="0"/>
+              </a:spcAft>
+              <a:buNone/>
+            </a:pPr>
+            <a:r>
+              <a:rPr lang="en-US" sz="1300" dirty="0">
+                <a:latin typeface="Calibri"/>
+                <a:ea typeface="Calibri"/>
+                <a:cs typeface="Calibri"/>
+                <a:sym typeface="Calibri"/>
+              </a:rPr>
+              <a:t>Data is indexed for effective search.</a:t>
+            </a:r>
+          </a:p>
+          <a:p>
+            <a:pPr marL="0" lvl="0" indent="0" algn="l" rtl="0">
+              <a:spcBef>
+                <a:spcPts val="0"/>
+              </a:spcBef>
+              <a:spcAft>
+                <a:spcPts val="0"/>
+              </a:spcAft>
+              <a:buNone/>
+            </a:pPr>
+            <a:r>
+              <a:rPr lang="en-US" sz="1300" dirty="0">
+                <a:latin typeface="Calibri"/>
+                <a:ea typeface="Calibri"/>
+                <a:cs typeface="Calibri"/>
+                <a:sym typeface="Calibri"/>
+              </a:rPr>
+              <a:t>You can effectively search through all data of your organization with queries like “search for documents talking about keys”, …</a:t>
+            </a:r>
+          </a:p>
+          <a:p>
+            <a:pPr marL="0" lvl="0" indent="0" algn="l" rtl="0">
+              <a:spcBef>
+                <a:spcPts val="0"/>
+              </a:spcBef>
+              <a:spcAft>
+                <a:spcPts val="0"/>
+              </a:spcAft>
+              <a:buNone/>
+            </a:pPr>
+            <a:r>
+              <a:rPr lang="en-US" sz="1300" dirty="0">
+                <a:latin typeface="Calibri"/>
+                <a:ea typeface="Calibri"/>
+                <a:cs typeface="Calibri"/>
+                <a:sym typeface="Calibri"/>
+              </a:rPr>
+              <a:t>You need to do searches as all users to find problematic data.</a:t>
+            </a:r>
+          </a:p>
+        </p:txBody>
+      </p:sp>
+      <p:pic>
+        <p:nvPicPr>
+          <p:cNvPr id="1026" name="Picture 2" descr="What's new for Microsoft Graph Developers at Build 2017 - Microsoft 365  Developer Blog">
+            <a:extLst>
+              <a:ext uri="{FF2B5EF4-FFF2-40B4-BE49-F238E27FC236}">
+                <a16:creationId xmlns:a16="http://schemas.microsoft.com/office/drawing/2014/main" id="{1AFB0EA5-650D-D32C-18A6-7BDA14C4D5AA}"/>
+              </a:ext>
+            </a:extLst>
+          </p:cNvPr>
+          <p:cNvPicPr>
+            <a:picLocks noChangeAspect="1" noChangeArrowheads="1"/>
+          </p:cNvPicPr>
+          <p:nvPr/>
+        </p:nvPicPr>
+        <p:blipFill>
+          <a:blip r:embed="rId5" cstate="email">
+            <a:extLst>
+              <a:ext uri="{28A0092B-C50C-407E-A947-70E740481C1C}">
+                <a14:useLocalDpi xmlns:a14="http://schemas.microsoft.com/office/drawing/2010/main" val="0"/>
+              </a:ext>
+            </a:extLst>
+          </a:blip>
+          <a:srcRect/>
+          <a:stretch>
+            <a:fillRect/>
+          </a:stretch>
+        </p:blipFill>
+        <p:spPr bwMode="auto">
+          <a:xfrm>
+            <a:off x="5004300" y="1028699"/>
+            <a:ext cx="3760443" cy="1920875"/>
+          </a:xfrm>
+          <a:prstGeom prst="rect">
+            <a:avLst/>
+          </a:prstGeom>
+          <a:noFill/>
+          <a:extLst>
+            <a:ext uri="{909E8E84-426E-40DD-AFC4-6F175D3DCCD1}">
+              <a14:hiddenFill xmlns:a14="http://schemas.microsoft.com/office/drawing/2010/main">
+                <a:solidFill>
+                  <a:srgbClr val="FFFFFF"/>
+                </a:solidFill>
+              </a14:hiddenFill>
+            </a:ext>
+          </a:extLst>
+        </p:spPr>
+      </p:pic>
+      <p:sp>
+        <p:nvSpPr>
+          <p:cNvPr id="2" name="Google Shape;62;p14">
+            <a:extLst>
+              <a:ext uri="{FF2B5EF4-FFF2-40B4-BE49-F238E27FC236}">
+                <a16:creationId xmlns:a16="http://schemas.microsoft.com/office/drawing/2014/main" id="{9522146A-0BFC-7195-4A4E-F21B5F37A150}"/>
+              </a:ext>
+            </a:extLst>
+          </p:cNvPr>
+          <p:cNvSpPr txBox="1"/>
+          <p:nvPr/>
+        </p:nvSpPr>
+        <p:spPr>
+          <a:xfrm>
+            <a:off x="258200" y="3805918"/>
+            <a:ext cx="4256650" cy="846355"/>
+          </a:xfrm>
+          <a:prstGeom prst="rect">
+            <a:avLst/>
+          </a:prstGeom>
+          <a:solidFill>
+            <a:srgbClr val="FFF2CC"/>
+          </a:solidFill>
+          <a:ln w="9525" cap="flat" cmpd="sng">
+            <a:solidFill>
+              <a:srgbClr val="FF0000"/>
+            </a:solidFill>
+            <a:prstDash val="solid"/>
+            <a:round/>
+            <a:headEnd type="none" w="sm" len="sm"/>
+            <a:tailEnd type="none" w="sm" len="sm"/>
+          </a:ln>
+        </p:spPr>
+        <p:txBody>
+          <a:bodyPr spcFirstLastPara="1" wrap="square" lIns="91425" tIns="91425" rIns="91425" bIns="91425" anchor="t" anchorCtr="0">
+            <a:spAutoFit/>
+          </a:bodyPr>
+          <a:lstStyle/>
+          <a:p>
+            <a:r>
+              <a:rPr lang="en-US" sz="1300" b="1" dirty="0">
+                <a:solidFill>
+                  <a:srgbClr val="FF0000"/>
+                </a:solidFill>
+                <a:latin typeface="Calibri"/>
+                <a:cs typeface="Calibri"/>
+                <a:sym typeface="Calibri"/>
+              </a:rPr>
+              <a:t>Microsoft Security Copilot</a:t>
+            </a:r>
+          </a:p>
+          <a:p>
+            <a:pPr marL="285750" lvl="0" indent="-285750" algn="l" rtl="0">
+              <a:spcBef>
+                <a:spcPts val="0"/>
+              </a:spcBef>
+              <a:spcAft>
+                <a:spcPts val="0"/>
+              </a:spcAft>
+              <a:buFont typeface="Arial" panose="020B0604020202020204" pitchFamily="34" charset="0"/>
+              <a:buChar char="•"/>
+            </a:pPr>
+            <a:r>
+              <a:rPr lang="en-US" sz="1000" dirty="0">
+                <a:latin typeface="Calibri"/>
+                <a:ea typeface="Calibri"/>
+                <a:cs typeface="Calibri"/>
+                <a:sym typeface="Calibri"/>
+                <a:hlinkClick r:id="rId6"/>
+              </a:rPr>
+              <a:t>https://www.microsoft.com/en-us/security/business/ai-machine-learning/microsoft-security-copilot</a:t>
+            </a:r>
+            <a:r>
+              <a:rPr lang="en-US" sz="1000" dirty="0">
+                <a:latin typeface="Calibri"/>
+                <a:ea typeface="Calibri"/>
+                <a:cs typeface="Calibri"/>
+                <a:sym typeface="Calibri"/>
+              </a:rPr>
+              <a:t> </a:t>
+            </a:r>
+          </a:p>
+          <a:p>
+            <a:pPr marL="285750" lvl="0" indent="-285750" algn="l" rtl="0">
+              <a:spcBef>
+                <a:spcPts val="0"/>
+              </a:spcBef>
+              <a:spcAft>
+                <a:spcPts val="0"/>
+              </a:spcAft>
+              <a:buFont typeface="Arial" panose="020B0604020202020204" pitchFamily="34" charset="0"/>
+              <a:buChar char="•"/>
+            </a:pPr>
+            <a:r>
+              <a:rPr lang="en-US" sz="1000" dirty="0">
+                <a:latin typeface="Calibri"/>
+                <a:ea typeface="Calibri"/>
+                <a:cs typeface="Calibri"/>
+                <a:sym typeface="Calibri"/>
+                <a:hlinkClick r:id="rId7"/>
+              </a:rPr>
+              <a:t>https://www.youtube.com/watch?v=0lg_derTkaM</a:t>
+            </a:r>
+            <a:r>
+              <a:rPr lang="en-US" sz="1000" dirty="0">
+                <a:latin typeface="Calibri"/>
+                <a:ea typeface="Calibri"/>
+                <a:cs typeface="Calibri"/>
+                <a:sym typeface="Calibri"/>
+              </a:rPr>
+              <a:t> </a:t>
+            </a:r>
+          </a:p>
+        </p:txBody>
+      </p:sp>
+      <p:pic>
+        <p:nvPicPr>
+          <p:cNvPr id="4" name="Picture 2" descr="What Is Microsoft Security Copilot? A Comprehensive Guide">
+            <a:extLst>
+              <a:ext uri="{FF2B5EF4-FFF2-40B4-BE49-F238E27FC236}">
+                <a16:creationId xmlns:a16="http://schemas.microsoft.com/office/drawing/2014/main" id="{B57B9A35-4FD0-A049-B496-209A47351B4A}"/>
+              </a:ext>
+            </a:extLst>
+          </p:cNvPr>
+          <p:cNvPicPr>
+            <a:picLocks noChangeAspect="1" noChangeArrowheads="1"/>
+          </p:cNvPicPr>
+          <p:nvPr/>
+        </p:nvPicPr>
+        <p:blipFill>
+          <a:blip r:embed="rId8">
+            <a:extLst>
+              <a:ext uri="{28A0092B-C50C-407E-A947-70E740481C1C}">
+                <a14:useLocalDpi xmlns:a14="http://schemas.microsoft.com/office/drawing/2010/main" val="0"/>
+              </a:ext>
+            </a:extLst>
+          </a:blip>
+          <a:srcRect/>
+          <a:stretch>
+            <a:fillRect/>
+          </a:stretch>
+        </p:blipFill>
+        <p:spPr bwMode="auto">
+          <a:xfrm>
+            <a:off x="5345113" y="3519482"/>
+            <a:ext cx="3228975" cy="1419225"/>
+          </a:xfrm>
+          <a:prstGeom prst="rect">
+            <a:avLst/>
+          </a:prstGeom>
+          <a:noFill/>
+          <a:extLst>
+            <a:ext uri="{909E8E84-426E-40DD-AFC4-6F175D3DCCD1}">
+              <a14:hiddenFill xmlns:a14="http://schemas.microsoft.com/office/drawing/2010/main">
+                <a:solidFill>
+                  <a:srgbClr val="FFFFFF"/>
+                </a:solidFill>
+              </a14:hiddenFill>
+            </a:ext>
+          </a:extLst>
+        </p:spPr>
+      </p:pic>
+    </p:spTree>
+    <p:extLst>
+      <p:ext uri="{BB962C8B-B14F-4D97-AF65-F5344CB8AC3E}">
+        <p14:creationId xmlns:p14="http://schemas.microsoft.com/office/powerpoint/2010/main" val="2531143623"/>
+      </p:ext>
+    </p:extLst>
+  </p:cSld>
+  <p:clrMapOvr>
+    <a:masterClrMapping/>
+  </p:clrMapOvr>
+</p:sld>
+</file>
+
+<file path=ppt/slides/slide8.xml><?xml version="1.0" encoding="utf-8"?>
+<p:sld xmlns:a="http://schemas.openxmlformats.org/drawingml/2006/main" xmlns:r="http://schemas.openxmlformats.org/officeDocument/2006/relationships" xmlns:p="http://schemas.openxmlformats.org/presentationml/2006/main">
+  <p:cSld>
+    <p:spTree>
+      <p:nvGrpSpPr>
+        <p:cNvPr id="1" name="Shape 60"/>
+        <p:cNvGrpSpPr/>
+        <p:nvPr/>
+      </p:nvGrpSpPr>
+      <p:grpSpPr>
+        <a:xfrm>
+          <a:off x="0" y="0"/>
+          <a:ext cx="0" cy="0"/>
+          <a:chOff x="0" y="0"/>
+          <a:chExt cx="0" cy="0"/>
+        </a:xfrm>
+      </p:grpSpPr>
+      <p:sp>
+        <p:nvSpPr>
+          <p:cNvPr id="61" name="Google Shape;61;p14"/>
+          <p:cNvSpPr txBox="1"/>
+          <p:nvPr/>
+        </p:nvSpPr>
+        <p:spPr>
+          <a:xfrm>
+            <a:off x="72300" y="0"/>
+            <a:ext cx="4932000" cy="326205"/>
+          </a:xfrm>
+          <a:prstGeom prst="rect">
+            <a:avLst/>
+          </a:prstGeom>
+          <a:noFill/>
+          <a:ln>
+            <a:noFill/>
+          </a:ln>
+        </p:spPr>
+        <p:txBody>
+          <a:bodyPr spcFirstLastPara="1" wrap="square" lIns="9125" tIns="9125" rIns="9125" bIns="9125" anchor="t" anchorCtr="0">
+            <a:spAutoFit/>
+          </a:bodyPr>
+          <a:lstStyle/>
+          <a:p>
+            <a:pPr marL="0" lvl="0" indent="0" algn="l" rtl="0">
+              <a:spcBef>
+                <a:spcPts val="0"/>
+              </a:spcBef>
+              <a:spcAft>
+                <a:spcPts val="0"/>
+              </a:spcAft>
+              <a:buNone/>
+            </a:pPr>
+            <a:r>
+              <a:rPr lang="en-US" sz="2000" b="1" dirty="0" err="1">
+                <a:solidFill>
+                  <a:schemeClr val="dk1"/>
+                </a:solidFill>
+                <a:latin typeface="Calibri"/>
+                <a:ea typeface="Calibri"/>
+                <a:cs typeface="Calibri"/>
+                <a:sym typeface="Calibri"/>
+              </a:rPr>
+              <a:t>Moveworks</a:t>
+            </a:r>
+            <a:r>
+              <a:rPr lang="en-US" sz="2000" b="1" dirty="0">
+                <a:solidFill>
+                  <a:schemeClr val="dk1"/>
+                </a:solidFill>
+                <a:latin typeface="Calibri"/>
+                <a:ea typeface="Calibri"/>
+                <a:cs typeface="Calibri"/>
+                <a:sym typeface="Calibri"/>
+              </a:rPr>
+              <a:t> Copilot works with Microsoft</a:t>
+            </a:r>
+          </a:p>
+        </p:txBody>
+      </p:sp>
+      <p:sp>
+        <p:nvSpPr>
+          <p:cNvPr id="62" name="Google Shape;62;p14"/>
+          <p:cNvSpPr txBox="1"/>
+          <p:nvPr/>
+        </p:nvSpPr>
+        <p:spPr>
+          <a:xfrm>
+            <a:off x="258200" y="508575"/>
+            <a:ext cx="4256650" cy="4185731"/>
+          </a:xfrm>
+          <a:prstGeom prst="rect">
+            <a:avLst/>
+          </a:prstGeom>
+          <a:solidFill>
+            <a:srgbClr val="FFF2CC"/>
+          </a:solidFill>
+          <a:ln w="9525" cap="flat" cmpd="sng">
+            <a:solidFill>
+              <a:srgbClr val="FF0000"/>
+            </a:solidFill>
+            <a:prstDash val="solid"/>
+            <a:round/>
+            <a:headEnd type="none" w="sm" len="sm"/>
+            <a:tailEnd type="none" w="sm" len="sm"/>
+          </a:ln>
+        </p:spPr>
+        <p:txBody>
+          <a:bodyPr spcFirstLastPara="1" wrap="square" lIns="91425" tIns="91425" rIns="91425" bIns="91425" anchor="t" anchorCtr="0">
+            <a:spAutoFit/>
+          </a:bodyPr>
+          <a:lstStyle/>
+          <a:p>
+            <a:pPr marL="0" lvl="0" indent="0" algn="l" rtl="0">
+              <a:spcBef>
+                <a:spcPts val="0"/>
+              </a:spcBef>
+              <a:spcAft>
+                <a:spcPts val="0"/>
+              </a:spcAft>
+              <a:buNone/>
+            </a:pPr>
+            <a:r>
+              <a:rPr lang="en-US" sz="1300" dirty="0" err="1">
+                <a:solidFill>
+                  <a:schemeClr val="tx1"/>
+                </a:solidFill>
+                <a:latin typeface="Calibri"/>
+                <a:ea typeface="Calibri"/>
+                <a:cs typeface="Calibri"/>
+                <a:sym typeface="Calibri"/>
+              </a:rPr>
+              <a:t>Moveworks</a:t>
+            </a:r>
+            <a:r>
+              <a:rPr lang="en-US" sz="1300" dirty="0">
+                <a:solidFill>
+                  <a:schemeClr val="tx1"/>
+                </a:solidFill>
+                <a:latin typeface="Calibri"/>
+                <a:ea typeface="Calibri"/>
+                <a:cs typeface="Calibri"/>
+                <a:sym typeface="Calibri"/>
+              </a:rPr>
+              <a:t> Copilot </a:t>
+            </a:r>
+            <a:r>
+              <a:rPr lang="en-US" sz="1300" dirty="0">
+                <a:solidFill>
+                  <a:schemeClr val="tx1"/>
+                </a:solidFill>
+                <a:latin typeface="Calibri"/>
+                <a:ea typeface="Calibri"/>
+                <a:cs typeface="Calibri"/>
+                <a:sym typeface="Calibri"/>
+                <a:hlinkClick r:id="rId3"/>
+              </a:rPr>
+              <a:t>–</a:t>
+            </a:r>
+            <a:r>
+              <a:rPr lang="en-US" sz="1300" dirty="0">
+                <a:solidFill>
+                  <a:schemeClr val="tx1"/>
+                </a:solidFill>
+                <a:latin typeface="Calibri"/>
+                <a:ea typeface="Calibri"/>
+                <a:cs typeface="Calibri"/>
+                <a:sym typeface="Calibri"/>
+              </a:rPr>
+              <a:t> works with Microsoft-365 apps and data</a:t>
+            </a:r>
+          </a:p>
+          <a:p>
+            <a:pPr marL="0" lvl="0" indent="0" algn="l" rtl="0">
+              <a:spcBef>
+                <a:spcPts val="0"/>
+              </a:spcBef>
+              <a:spcAft>
+                <a:spcPts val="0"/>
+              </a:spcAft>
+              <a:buNone/>
+            </a:pPr>
+            <a:endParaRPr lang="en-US" sz="1300" dirty="0">
+              <a:solidFill>
+                <a:schemeClr val="tx1"/>
+              </a:solidFill>
+              <a:latin typeface="Calibri"/>
+              <a:ea typeface="Calibri"/>
+              <a:cs typeface="Calibri"/>
+              <a:sym typeface="Calibri"/>
+              <a:hlinkClick r:id="rId3"/>
+            </a:endParaRPr>
+          </a:p>
+          <a:p>
+            <a:pPr marL="0" lvl="0" indent="0" algn="l" rtl="0">
+              <a:spcBef>
+                <a:spcPts val="0"/>
+              </a:spcBef>
+              <a:spcAft>
+                <a:spcPts val="0"/>
+              </a:spcAft>
+              <a:buNone/>
+            </a:pPr>
+            <a:r>
+              <a:rPr lang="en-US" sz="1300" dirty="0">
+                <a:solidFill>
+                  <a:schemeClr val="tx1"/>
+                </a:solidFill>
+                <a:latin typeface="Calibri"/>
+                <a:ea typeface="Calibri"/>
+                <a:cs typeface="Calibri"/>
+                <a:sym typeface="Calibri"/>
+                <a:hlinkClick r:id="rId3"/>
+              </a:rPr>
+              <a:t>https://www.moveworks.com/us/en/resources/blog/ai-security-for-a-next-gen-copilot</a:t>
+            </a:r>
+            <a:r>
+              <a:rPr lang="en-US" sz="1300" dirty="0">
+                <a:solidFill>
+                  <a:schemeClr val="tx1"/>
+                </a:solidFill>
+                <a:latin typeface="Calibri"/>
+                <a:ea typeface="Calibri"/>
+                <a:cs typeface="Calibri"/>
+                <a:sym typeface="Calibri"/>
+              </a:rPr>
+              <a:t> </a:t>
+            </a:r>
+          </a:p>
+          <a:p>
+            <a:pPr marL="0" lvl="0" indent="0" algn="l" rtl="0">
+              <a:spcBef>
+                <a:spcPts val="0"/>
+              </a:spcBef>
+              <a:spcAft>
+                <a:spcPts val="0"/>
+              </a:spcAft>
+              <a:buNone/>
+            </a:pPr>
+            <a:endParaRPr lang="en-US" sz="1300" dirty="0">
+              <a:solidFill>
+                <a:schemeClr val="tx1"/>
+              </a:solidFill>
+              <a:latin typeface="Calibri"/>
+              <a:ea typeface="Calibri"/>
+              <a:cs typeface="Calibri"/>
+              <a:sym typeface="Calibri"/>
+            </a:endParaRPr>
+          </a:p>
+          <a:p>
+            <a:pPr marL="0" lvl="0" indent="0" algn="l" rtl="0">
+              <a:spcBef>
+                <a:spcPts val="0"/>
+              </a:spcBef>
+              <a:spcAft>
+                <a:spcPts val="0"/>
+              </a:spcAft>
+              <a:buNone/>
+            </a:pPr>
+            <a:r>
+              <a:rPr lang="en-US" sz="1300" dirty="0" err="1">
+                <a:solidFill>
+                  <a:schemeClr val="tx1"/>
+                </a:solidFill>
+                <a:latin typeface="Calibri"/>
+                <a:ea typeface="Calibri"/>
+                <a:cs typeface="Calibri"/>
+                <a:sym typeface="Calibri"/>
+              </a:rPr>
+              <a:t>Moveworks</a:t>
+            </a:r>
+            <a:r>
+              <a:rPr lang="en-US" sz="1300" dirty="0">
+                <a:solidFill>
+                  <a:schemeClr val="tx1"/>
+                </a:solidFill>
+                <a:latin typeface="Calibri"/>
+                <a:ea typeface="Calibri"/>
+                <a:cs typeface="Calibri"/>
+                <a:sym typeface="Calibri"/>
+              </a:rPr>
+              <a:t> Blog: All in on AI: 4 key learnings from Microsoft Build 2023: </a:t>
+            </a:r>
+            <a:r>
+              <a:rPr lang="en-US" sz="1300" dirty="0">
+                <a:solidFill>
+                  <a:schemeClr val="tx1"/>
+                </a:solidFill>
+                <a:latin typeface="Calibri"/>
+                <a:ea typeface="Calibri"/>
+                <a:cs typeface="Calibri"/>
+                <a:sym typeface="Calibri"/>
+                <a:hlinkClick r:id="rId4"/>
+              </a:rPr>
+              <a:t>https://www.moveworks.com/us/en/resources/blog/microsoft-build-2023-event-recap</a:t>
+            </a:r>
+            <a:r>
+              <a:rPr lang="en-US" sz="1300" dirty="0">
+                <a:solidFill>
+                  <a:schemeClr val="tx1"/>
+                </a:solidFill>
+                <a:latin typeface="Calibri"/>
+                <a:ea typeface="Calibri"/>
+                <a:cs typeface="Calibri"/>
+                <a:sym typeface="Calibri"/>
+              </a:rPr>
+              <a:t> </a:t>
+            </a:r>
+          </a:p>
+          <a:p>
+            <a:pPr marL="0" lvl="0" indent="0" algn="l" rtl="0">
+              <a:spcBef>
+                <a:spcPts val="0"/>
+              </a:spcBef>
+              <a:spcAft>
+                <a:spcPts val="0"/>
+              </a:spcAft>
+              <a:buNone/>
+            </a:pPr>
+            <a:endParaRPr lang="en-US" sz="1300" dirty="0">
+              <a:solidFill>
+                <a:schemeClr val="tx1"/>
+              </a:solidFill>
+              <a:latin typeface="Calibri"/>
+              <a:ea typeface="Calibri"/>
+              <a:cs typeface="Calibri"/>
+              <a:sym typeface="Calibri"/>
+            </a:endParaRPr>
+          </a:p>
+          <a:p>
+            <a:pPr marL="0" lvl="0" indent="0" algn="l" rtl="0">
+              <a:spcBef>
+                <a:spcPts val="0"/>
+              </a:spcBef>
+              <a:spcAft>
+                <a:spcPts val="0"/>
+              </a:spcAft>
+              <a:buNone/>
+            </a:pPr>
+            <a:r>
+              <a:rPr lang="en-US" sz="1300" dirty="0">
+                <a:solidFill>
+                  <a:schemeClr val="tx1"/>
+                </a:solidFill>
+                <a:latin typeface="Calibri"/>
+                <a:ea typeface="Calibri"/>
+                <a:cs typeface="Calibri"/>
+                <a:sym typeface="Calibri"/>
+              </a:rPr>
+              <a:t>Microsoft Blog: 3 ways </a:t>
+            </a:r>
+            <a:r>
+              <a:rPr lang="en-US" sz="1300" dirty="0" err="1">
+                <a:solidFill>
+                  <a:schemeClr val="tx1"/>
+                </a:solidFill>
+                <a:latin typeface="Calibri"/>
+                <a:ea typeface="Calibri"/>
+                <a:cs typeface="Calibri"/>
+                <a:sym typeface="Calibri"/>
+              </a:rPr>
+              <a:t>Moveworks</a:t>
+            </a:r>
+            <a:r>
+              <a:rPr lang="en-US" sz="1300" dirty="0">
+                <a:solidFill>
+                  <a:schemeClr val="tx1"/>
+                </a:solidFill>
+                <a:latin typeface="Calibri"/>
+                <a:ea typeface="Calibri"/>
+                <a:cs typeface="Calibri"/>
+                <a:sym typeface="Calibri"/>
+              </a:rPr>
+              <a:t> and Microsoft Teams use AI to improve employee productivity: </a:t>
+            </a:r>
+            <a:r>
+              <a:rPr lang="en-US" sz="1300" dirty="0">
+                <a:solidFill>
+                  <a:schemeClr val="tx1"/>
+                </a:solidFill>
+                <a:latin typeface="Calibri"/>
+                <a:ea typeface="Calibri"/>
+                <a:cs typeface="Calibri"/>
+                <a:sym typeface="Calibri"/>
+                <a:hlinkClick r:id="rId5"/>
+              </a:rPr>
+              <a:t>https://www.microsoft.com/en-us/microsoft-365/blog/2023/07/10/3-ways-moveworks-and-microsoft-teams-use-ai-to-improve-employee-productivity/</a:t>
+            </a:r>
+            <a:r>
+              <a:rPr lang="en-US" sz="1300" dirty="0">
+                <a:solidFill>
+                  <a:schemeClr val="tx1"/>
+                </a:solidFill>
+                <a:latin typeface="Calibri"/>
+                <a:ea typeface="Calibri"/>
+                <a:cs typeface="Calibri"/>
+                <a:sym typeface="Calibri"/>
+              </a:rPr>
+              <a:t> </a:t>
+            </a:r>
+          </a:p>
+          <a:p>
+            <a:pPr marL="0" lvl="0" indent="0" algn="l" rtl="0">
+              <a:spcBef>
+                <a:spcPts val="0"/>
+              </a:spcBef>
+              <a:spcAft>
+                <a:spcPts val="0"/>
+              </a:spcAft>
+              <a:buNone/>
+            </a:pPr>
+            <a:endParaRPr lang="en-US" sz="1300" dirty="0">
+              <a:solidFill>
+                <a:schemeClr val="tx1"/>
+              </a:solidFill>
+              <a:latin typeface="Calibri"/>
+              <a:ea typeface="Calibri"/>
+              <a:cs typeface="Calibri"/>
+              <a:sym typeface="Calibri"/>
+            </a:endParaRPr>
+          </a:p>
+          <a:p>
+            <a:pPr marL="0" lvl="0" indent="0" algn="l" rtl="0">
+              <a:spcBef>
+                <a:spcPts val="0"/>
+              </a:spcBef>
+              <a:spcAft>
+                <a:spcPts val="0"/>
+              </a:spcAft>
+              <a:buNone/>
+            </a:pPr>
+            <a:r>
+              <a:rPr lang="en-US" sz="1300" dirty="0">
+                <a:solidFill>
+                  <a:schemeClr val="tx1"/>
+                </a:solidFill>
+                <a:latin typeface="Calibri"/>
+                <a:ea typeface="Calibri"/>
+                <a:cs typeface="Calibri"/>
+                <a:sym typeface="Calibri"/>
+              </a:rPr>
+              <a:t>Microsoft Learn: Data, Privacy, and Security for Microsoft Copilot for Microsoft 365: </a:t>
+            </a:r>
+            <a:r>
+              <a:rPr lang="en-US" sz="1300" dirty="0">
+                <a:solidFill>
+                  <a:schemeClr val="tx1"/>
+                </a:solidFill>
+                <a:latin typeface="Calibri"/>
+                <a:ea typeface="Calibri"/>
+                <a:cs typeface="Calibri"/>
+                <a:sym typeface="Calibri"/>
+                <a:hlinkClick r:id="rId6"/>
+              </a:rPr>
+              <a:t>https://learn.microsoft.com/en-us/microsoft-365-copilot/microsoft-365-copilot-privacy</a:t>
+            </a:r>
+            <a:r>
+              <a:rPr lang="en-US" sz="1300" dirty="0">
+                <a:solidFill>
+                  <a:schemeClr val="tx1"/>
+                </a:solidFill>
+                <a:latin typeface="Calibri"/>
+                <a:ea typeface="Calibri"/>
+                <a:cs typeface="Calibri"/>
+                <a:sym typeface="Calibri"/>
+              </a:rPr>
+              <a:t> </a:t>
+            </a:r>
+          </a:p>
+        </p:txBody>
+      </p:sp>
+    </p:spTree>
+    <p:extLst>
+      <p:ext uri="{BB962C8B-B14F-4D97-AF65-F5344CB8AC3E}">
+        <p14:creationId xmlns:p14="http://schemas.microsoft.com/office/powerpoint/2010/main" val="3895372624"/>
+      </p:ext>
+    </p:extLst>
+  </p:cSld>
+  <p:clrMapOvr>
+    <a:masterClrMapping/>
+  </p:clrMapOvr>
+</p:sld>
+</file>
+
+<file path=ppt/slides/slide9.xml><?xml version="1.0" encoding="utf-8"?>
 <p:sld xmlns:a="http://schemas.openxmlformats.org/drawingml/2006/main" xmlns:r="http://schemas.openxmlformats.org/officeDocument/2006/relationships" xmlns:p="http://schemas.openxmlformats.org/presentationml/2006/main">
   <p:cSld>
     <p:spTree>

--- a/2024/2024-03-01-AI-Risk.pptx
+++ b/2024/2024-03-01-AI-Risk.pptx
@@ -1,11 +1,11 @@
 
 <file path=ppt/presentation.xml><?xml version="1.0" encoding="utf-8"?>
-<p:presentation xmlns:a="http://schemas.openxmlformats.org/drawingml/2006/main" xmlns:r="http://schemas.openxmlformats.org/officeDocument/2006/relationships" xmlns:p="http://schemas.openxmlformats.org/presentationml/2006/main" strictFirstAndLastChars="0" saveSubsetFonts="1">
+<p:presentation xmlns:a="http://schemas.openxmlformats.org/drawingml/2006/main" xmlns:r="http://schemas.openxmlformats.org/officeDocument/2006/relationships" xmlns:p="http://schemas.openxmlformats.org/presentationml/2006/main" strictFirstAndLastChars="0" saveSubsetFonts="1" autoCompressPictures="0">
   <p:sldMasterIdLst>
     <p:sldMasterId id="2147483659" r:id="rId1"/>
   </p:sldMasterIdLst>
   <p:notesMasterIdLst>
-    <p:notesMasterId r:id="rId11"/>
+    <p:notesMasterId r:id="rId9"/>
   </p:notesMasterIdLst>
   <p:sldIdLst>
     <p:sldId id="256" r:id="rId2"/>
@@ -14,9 +14,7 @@
     <p:sldId id="259" r:id="rId5"/>
     <p:sldId id="260" r:id="rId6"/>
     <p:sldId id="261" r:id="rId7"/>
-    <p:sldId id="264" r:id="rId8"/>
-    <p:sldId id="265" r:id="rId9"/>
-    <p:sldId id="262" r:id="rId10"/>
+    <p:sldId id="262" r:id="rId8"/>
   </p:sldIdLst>
   <p:sldSz cx="9144000" cy="5143500" type="screen16x9"/>
   <p:notesSz cx="6858000" cy="9144000"/>
@@ -946,7 +944,7 @@
         </p:nvSpPr>
         <p:spPr>
           <a:xfrm>
-            <a:off x="381000" y="685800"/>
+            <a:off x="381300" y="685800"/>
             <a:ext cx="6096000" cy="3429000"/>
           </a:xfrm>
           <a:custGeom>
@@ -1258,7 +1256,7 @@
         </p:nvSpPr>
         <p:spPr>
           <a:xfrm>
-            <a:off x="381000" y="685800"/>
+            <a:off x="381300" y="685800"/>
             <a:ext cx="6096000" cy="3429000"/>
           </a:xfrm>
           <a:custGeom>
@@ -1334,224 +1332,6 @@
 </file>
 
 <file path=ppt/notesSlides/notesSlide7.xml><?xml version="1.0" encoding="utf-8"?>
-<p:notes xmlns:a="http://schemas.openxmlformats.org/drawingml/2006/main" xmlns:r="http://schemas.openxmlformats.org/officeDocument/2006/relationships" xmlns:p="http://schemas.openxmlformats.org/presentationml/2006/main" showMasterSp="0" showMasterPhAnim="0">
-  <p:cSld>
-    <p:spTree>
-      <p:nvGrpSpPr>
-        <p:cNvPr id="1" name="Shape 57"/>
-        <p:cNvGrpSpPr/>
-        <p:nvPr/>
-      </p:nvGrpSpPr>
-      <p:grpSpPr>
-        <a:xfrm>
-          <a:off x="0" y="0"/>
-          <a:ext cx="0" cy="0"/>
-          <a:chOff x="0" y="0"/>
-          <a:chExt cx="0" cy="0"/>
-        </a:xfrm>
-      </p:grpSpPr>
-      <p:sp>
-        <p:nvSpPr>
-          <p:cNvPr id="58" name="Google Shape;58;g2bcfa8c8ef8_0_0:notes"/>
-          <p:cNvSpPr>
-            <a:spLocks noGrp="1" noRot="1" noChangeAspect="1"/>
-          </p:cNvSpPr>
-          <p:nvPr>
-            <p:ph type="sldImg" idx="2"/>
-          </p:nvPr>
-        </p:nvSpPr>
-        <p:spPr>
-          <a:xfrm>
-            <a:off x="381000" y="685800"/>
-            <a:ext cx="6096000" cy="3429000"/>
-          </a:xfrm>
-          <a:custGeom>
-            <a:avLst/>
-            <a:gdLst/>
-            <a:ahLst/>
-            <a:cxnLst/>
-            <a:rect l="l" t="t" r="r" b="b"/>
-            <a:pathLst>
-              <a:path w="120000" h="120000" extrusionOk="0">
-                <a:moveTo>
-                  <a:pt x="0" y="0"/>
-                </a:moveTo>
-                <a:lnTo>
-                  <a:pt x="120000" y="0"/>
-                </a:lnTo>
-                <a:lnTo>
-                  <a:pt x="120000" y="120000"/>
-                </a:lnTo>
-                <a:lnTo>
-                  <a:pt x="0" y="120000"/>
-                </a:lnTo>
-                <a:close/>
-              </a:path>
-            </a:pathLst>
-          </a:custGeom>
-        </p:spPr>
-      </p:sp>
-      <p:sp>
-        <p:nvSpPr>
-          <p:cNvPr id="59" name="Google Shape;59;g2bcfa8c8ef8_0_0:notes"/>
-          <p:cNvSpPr txBox="1">
-            <a:spLocks noGrp="1"/>
-          </p:cNvSpPr>
-          <p:nvPr>
-            <p:ph type="body" idx="1"/>
-          </p:nvPr>
-        </p:nvSpPr>
-        <p:spPr>
-          <a:xfrm>
-            <a:off x="685800" y="4343400"/>
-            <a:ext cx="5486400" cy="4114800"/>
-          </a:xfrm>
-          <a:prstGeom prst="rect">
-            <a:avLst/>
-          </a:prstGeom>
-        </p:spPr>
-        <p:txBody>
-          <a:bodyPr spcFirstLastPara="1" wrap="square" lIns="91425" tIns="91425" rIns="91425" bIns="91425" anchor="t" anchorCtr="0">
-            <a:noAutofit/>
-          </a:bodyPr>
-          <a:lstStyle/>
-          <a:p>
-            <a:pPr marL="0" lvl="0" indent="0" algn="l" rtl="0">
-              <a:spcBef>
-                <a:spcPts val="0"/>
-              </a:spcBef>
-              <a:spcAft>
-                <a:spcPts val="0"/>
-              </a:spcAft>
-              <a:buNone/>
-            </a:pPr>
-            <a:endParaRPr/>
-          </a:p>
-        </p:txBody>
-      </p:sp>
-    </p:spTree>
-    <p:extLst>
-      <p:ext uri="{BB962C8B-B14F-4D97-AF65-F5344CB8AC3E}">
-        <p14:creationId xmlns:p14="http://schemas.microsoft.com/office/powerpoint/2010/main" val="1096779016"/>
-      </p:ext>
-    </p:extLst>
-  </p:cSld>
-  <p:clrMapOvr>
-    <a:masterClrMapping/>
-  </p:clrMapOvr>
-</p:notes>
-</file>
-
-<file path=ppt/notesSlides/notesSlide8.xml><?xml version="1.0" encoding="utf-8"?>
-<p:notes xmlns:a="http://schemas.openxmlformats.org/drawingml/2006/main" xmlns:r="http://schemas.openxmlformats.org/officeDocument/2006/relationships" xmlns:p="http://schemas.openxmlformats.org/presentationml/2006/main" showMasterSp="0" showMasterPhAnim="0">
-  <p:cSld>
-    <p:spTree>
-      <p:nvGrpSpPr>
-        <p:cNvPr id="1" name="Shape 57"/>
-        <p:cNvGrpSpPr/>
-        <p:nvPr/>
-      </p:nvGrpSpPr>
-      <p:grpSpPr>
-        <a:xfrm>
-          <a:off x="0" y="0"/>
-          <a:ext cx="0" cy="0"/>
-          <a:chOff x="0" y="0"/>
-          <a:chExt cx="0" cy="0"/>
-        </a:xfrm>
-      </p:grpSpPr>
-      <p:sp>
-        <p:nvSpPr>
-          <p:cNvPr id="58" name="Google Shape;58;g2bcfa8c8ef8_0_0:notes"/>
-          <p:cNvSpPr>
-            <a:spLocks noGrp="1" noRot="1" noChangeAspect="1"/>
-          </p:cNvSpPr>
-          <p:nvPr>
-            <p:ph type="sldImg" idx="2"/>
-          </p:nvPr>
-        </p:nvSpPr>
-        <p:spPr>
-          <a:xfrm>
-            <a:off x="381000" y="685800"/>
-            <a:ext cx="6096000" cy="3429000"/>
-          </a:xfrm>
-          <a:custGeom>
-            <a:avLst/>
-            <a:gdLst/>
-            <a:ahLst/>
-            <a:cxnLst/>
-            <a:rect l="l" t="t" r="r" b="b"/>
-            <a:pathLst>
-              <a:path w="120000" h="120000" extrusionOk="0">
-                <a:moveTo>
-                  <a:pt x="0" y="0"/>
-                </a:moveTo>
-                <a:lnTo>
-                  <a:pt x="120000" y="0"/>
-                </a:lnTo>
-                <a:lnTo>
-                  <a:pt x="120000" y="120000"/>
-                </a:lnTo>
-                <a:lnTo>
-                  <a:pt x="0" y="120000"/>
-                </a:lnTo>
-                <a:close/>
-              </a:path>
-            </a:pathLst>
-          </a:custGeom>
-        </p:spPr>
-      </p:sp>
-      <p:sp>
-        <p:nvSpPr>
-          <p:cNvPr id="59" name="Google Shape;59;g2bcfa8c8ef8_0_0:notes"/>
-          <p:cNvSpPr txBox="1">
-            <a:spLocks noGrp="1"/>
-          </p:cNvSpPr>
-          <p:nvPr>
-            <p:ph type="body" idx="1"/>
-          </p:nvPr>
-        </p:nvSpPr>
-        <p:spPr>
-          <a:xfrm>
-            <a:off x="685800" y="4343400"/>
-            <a:ext cx="5486400" cy="4114800"/>
-          </a:xfrm>
-          <a:prstGeom prst="rect">
-            <a:avLst/>
-          </a:prstGeom>
-        </p:spPr>
-        <p:txBody>
-          <a:bodyPr spcFirstLastPara="1" wrap="square" lIns="91425" tIns="91425" rIns="91425" bIns="91425" anchor="t" anchorCtr="0">
-            <a:noAutofit/>
-          </a:bodyPr>
-          <a:lstStyle/>
-          <a:p>
-            <a:pPr marL="0" lvl="0" indent="0" algn="l" rtl="0">
-              <a:spcBef>
-                <a:spcPts val="0"/>
-              </a:spcBef>
-              <a:spcAft>
-                <a:spcPts val="0"/>
-              </a:spcAft>
-              <a:buNone/>
-            </a:pPr>
-            <a:endParaRPr/>
-          </a:p>
-        </p:txBody>
-      </p:sp>
-    </p:spTree>
-    <p:extLst>
-      <p:ext uri="{BB962C8B-B14F-4D97-AF65-F5344CB8AC3E}">
-        <p14:creationId xmlns:p14="http://schemas.microsoft.com/office/powerpoint/2010/main" val="1870193943"/>
-      </p:ext>
-    </p:extLst>
-  </p:cSld>
-  <p:clrMapOvr>
-    <a:masterClrMapping/>
-  </p:clrMapOvr>
-</p:notes>
-</file>
-
-<file path=ppt/notesSlides/notesSlide9.xml><?xml version="1.0" encoding="utf-8"?>
 <p:notes xmlns:a="http://schemas.openxmlformats.org/drawingml/2006/main" xmlns:r="http://schemas.openxmlformats.org/officeDocument/2006/relationships" xmlns:p="http://schemas.openxmlformats.org/presentationml/2006/main" showMasterSp="0" showMasterPhAnim="0">
   <p:cSld>
     <p:spTree>
@@ -7249,8 +7029,8 @@
         </p:nvSpPr>
         <p:spPr>
           <a:xfrm>
-            <a:off x="379374" y="678450"/>
-            <a:ext cx="8382581" cy="4185731"/>
+            <a:off x="379375" y="678450"/>
+            <a:ext cx="8381400" cy="3986700"/>
           </a:xfrm>
           <a:prstGeom prst="rect">
             <a:avLst/>
@@ -7284,7 +7064,7 @@
               <a:buNone/>
             </a:pPr>
             <a:r>
-              <a:rPr lang="en" sz="1300" dirty="0">
+              <a:rPr lang="en" sz="1300">
                 <a:latin typeface="Calibri"/>
                 <a:ea typeface="Calibri"/>
                 <a:cs typeface="Calibri"/>
@@ -7292,7 +7072,7 @@
               </a:rPr>
               <a:t>AI Risks Management Strategies</a:t>
             </a:r>
-            <a:endParaRPr sz="1300" dirty="0">
+            <a:endParaRPr sz="1300">
               <a:latin typeface="Calibri"/>
               <a:ea typeface="Calibri"/>
               <a:cs typeface="Calibri"/>
@@ -7312,7 +7092,7 @@
               <a:buChar char="●"/>
             </a:pPr>
             <a:r>
-              <a:rPr lang="en" sz="1300" dirty="0">
+              <a:rPr lang="en" sz="1300">
                 <a:latin typeface="Calibri"/>
                 <a:ea typeface="Calibri"/>
                 <a:cs typeface="Calibri"/>
@@ -7320,7 +7100,7 @@
               </a:rPr>
               <a:t>Governance Framework: Establish clear policies on LLM use</a:t>
             </a:r>
-            <a:endParaRPr sz="1300" dirty="0">
+            <a:endParaRPr sz="1300">
               <a:latin typeface="Calibri"/>
               <a:ea typeface="Calibri"/>
               <a:cs typeface="Calibri"/>
@@ -7340,7 +7120,7 @@
               <a:buChar char="●"/>
             </a:pPr>
             <a:r>
-              <a:rPr lang="en" sz="1300" dirty="0">
+              <a:rPr lang="en" sz="1300">
                 <a:latin typeface="Calibri"/>
                 <a:ea typeface="Calibri"/>
                 <a:cs typeface="Calibri"/>
@@ -7348,7 +7128,7 @@
               </a:rPr>
               <a:t>Risk Assessment: Identify risks related to specific LLM applications</a:t>
             </a:r>
-            <a:endParaRPr sz="1300" dirty="0">
+            <a:endParaRPr sz="1300">
               <a:latin typeface="Calibri"/>
               <a:ea typeface="Calibri"/>
               <a:cs typeface="Calibri"/>
@@ -7368,7 +7148,7 @@
               <a:buChar char="●"/>
             </a:pPr>
             <a:r>
-              <a:rPr lang="en" sz="1300" dirty="0">
+              <a:rPr lang="en" sz="1300">
                 <a:latin typeface="Calibri"/>
                 <a:ea typeface="Calibri"/>
                 <a:cs typeface="Calibri"/>
@@ -7377,7 +7157,7 @@
               <a:t>Implement fail-safes to prevent LLM from </a:t>
             </a:r>
             <a:r>
-              <a:rPr lang="en" sz="1300" dirty="0">
+              <a:rPr lang="en" sz="1300">
                 <a:solidFill>
                   <a:schemeClr val="dk1"/>
                 </a:solidFill>
@@ -7388,7 +7168,7 @@
               </a:rPr>
               <a:t>solely controlling actions that could cause significant harm</a:t>
             </a:r>
-            <a:endParaRPr sz="1300" dirty="0">
+            <a:endParaRPr sz="1300">
               <a:solidFill>
                 <a:schemeClr val="dk1"/>
               </a:solidFill>
@@ -7414,7 +7194,7 @@
               <a:buChar char="●"/>
             </a:pPr>
             <a:r>
-              <a:rPr lang="en" sz="1300" dirty="0">
+              <a:rPr lang="en" sz="1300">
                 <a:solidFill>
                   <a:schemeClr val="dk1"/>
                 </a:solidFill>
@@ -7425,7 +7205,7 @@
               </a:rPr>
               <a:t>If possible, frame the LLM's role as providing insights to human experts, not as a final decision-making authority</a:t>
             </a:r>
-            <a:endParaRPr sz="1300" dirty="0">
+            <a:endParaRPr sz="1300">
               <a:solidFill>
                 <a:schemeClr val="dk1"/>
               </a:solidFill>
@@ -7448,7 +7228,7 @@
               <a:buChar char="●"/>
             </a:pPr>
             <a:r>
-              <a:rPr lang="en" sz="1300" dirty="0">
+              <a:rPr lang="en" sz="1300">
                 <a:latin typeface="Calibri"/>
                 <a:ea typeface="Calibri"/>
                 <a:cs typeface="Calibri"/>
@@ -7456,7 +7236,7 @@
               </a:rPr>
               <a:t>Implement Controls: Utilize data de-identification, bias testing, human oversight (human-in-the-loop), and security measures (encryption, access control, secure data storage, regular penetration testing)</a:t>
             </a:r>
-            <a:endParaRPr sz="1300" dirty="0">
+            <a:endParaRPr sz="1300">
               <a:latin typeface="Calibri"/>
               <a:ea typeface="Calibri"/>
               <a:cs typeface="Calibri"/>
@@ -7476,7 +7256,7 @@
               <a:buChar char="●"/>
             </a:pPr>
             <a:r>
-              <a:rPr lang="en" sz="1300" dirty="0">
+              <a:rPr lang="en" sz="1300">
                 <a:latin typeface="Calibri"/>
                 <a:ea typeface="Calibri"/>
                 <a:cs typeface="Calibri"/>
@@ -7484,7 +7264,7 @@
               </a:rPr>
               <a:t>Monitoring &amp; Auditing: Track LLM outputs, periodically audit for issues; Content moderation; Fact-checking mechanisms; Human-in-the-loop review for sensitive topics; Guidelines for avoiding offensive/inappropriate responses</a:t>
             </a:r>
-            <a:endParaRPr sz="1300" dirty="0">
+            <a:endParaRPr sz="1300">
               <a:latin typeface="Calibri"/>
               <a:ea typeface="Calibri"/>
               <a:cs typeface="Calibri"/>
@@ -7504,7 +7284,7 @@
               <a:buChar char="●"/>
             </a:pPr>
             <a:r>
-              <a:rPr lang="en" sz="1300" dirty="0">
+              <a:rPr lang="en" sz="1300">
                 <a:latin typeface="Calibri"/>
                 <a:ea typeface="Calibri"/>
                 <a:cs typeface="Calibri"/>
@@ -7512,7 +7292,7 @@
               </a:rPr>
               <a:t>Technical: Stress testing; Redundancy &amp; failover plans; 24/7 monitoring (if critical to your business)</a:t>
             </a:r>
-            <a:endParaRPr sz="1300" dirty="0">
+            <a:endParaRPr sz="1300">
               <a:latin typeface="Calibri"/>
               <a:ea typeface="Calibri"/>
               <a:cs typeface="Calibri"/>
@@ -7532,7 +7312,7 @@
               <a:buChar char="●"/>
             </a:pPr>
             <a:r>
-              <a:rPr lang="en" sz="1300" dirty="0">
+              <a:rPr lang="en" sz="1300">
                 <a:latin typeface="Calibri"/>
                 <a:ea typeface="Calibri"/>
                 <a:cs typeface="Calibri"/>
@@ -7540,7 +7320,7 @@
               </a:rPr>
               <a:t>Training: Educate employees on LLM capabilities and responsible use</a:t>
             </a:r>
-            <a:endParaRPr sz="1300" dirty="0">
+            <a:endParaRPr sz="1300">
               <a:latin typeface="Calibri"/>
               <a:ea typeface="Calibri"/>
               <a:cs typeface="Calibri"/>
@@ -7560,7 +7340,7 @@
               <a:buChar char="●"/>
             </a:pPr>
             <a:r>
-              <a:rPr lang="en" sz="1300" dirty="0">
+              <a:rPr lang="en" sz="1300">
                 <a:latin typeface="Calibri"/>
                 <a:ea typeface="Calibri"/>
                 <a:cs typeface="Calibri"/>
@@ -7569,7 +7349,7 @@
               <a:t>Legal: which laws would apply? (</a:t>
             </a:r>
             <a:r>
-              <a:rPr lang="en" sz="1300" b="1" dirty="0">
+              <a:rPr lang="en" sz="1300" b="1">
                 <a:solidFill>
                   <a:srgbClr val="FF0000"/>
                 </a:solidFill>
@@ -7581,7 +7361,7 @@
               <a:t>GDPR</a:t>
             </a:r>
             <a:r>
-              <a:rPr lang="en" sz="1300" dirty="0">
+              <a:rPr lang="en" sz="1300">
                 <a:latin typeface="Calibri"/>
                 <a:ea typeface="Calibri"/>
                 <a:cs typeface="Calibri"/>
@@ -7590,7 +7370,7 @@
               <a:t>, </a:t>
             </a:r>
             <a:r>
-              <a:rPr lang="en" sz="1300" b="1" dirty="0">
+              <a:rPr lang="en" sz="1300" b="1">
                 <a:solidFill>
                   <a:srgbClr val="FF0000"/>
                 </a:solidFill>
@@ -7602,28 +7382,7 @@
               <a:t>CCPA</a:t>
             </a:r>
             <a:r>
-              <a:rPr lang="en" sz="1300" dirty="0">
-                <a:latin typeface="Calibri"/>
-                <a:ea typeface="Calibri"/>
-                <a:cs typeface="Calibri"/>
-                <a:sym typeface="Calibri"/>
-              </a:rPr>
-              <a:t>, </a:t>
-            </a:r>
-            <a:r>
-              <a:rPr lang="en-US" sz="1300" b="1" dirty="0">
-                <a:solidFill>
-                  <a:srgbClr val="FF0000"/>
-                </a:solidFill>
-                <a:latin typeface="Calibri"/>
-                <a:ea typeface="Calibri"/>
-                <a:cs typeface="Calibri"/>
-                <a:sym typeface="Calibri"/>
-              </a:rPr>
-              <a:t>HIPAA</a:t>
-            </a:r>
-            <a:r>
-              <a:rPr lang="en" sz="1300" dirty="0">
+              <a:rPr lang="en" sz="1300">
                 <a:latin typeface="Calibri"/>
                 <a:ea typeface="Calibri"/>
                 <a:cs typeface="Calibri"/>
@@ -7632,7 +7391,7 @@
               <a:t>, etc.); Legal review of chatbot scripts and data collection; Clear privacy notices to users; Mechanisms for data subject rights (access, deletion)</a:t>
             </a:r>
             <a:br>
-              <a:rPr lang="en" sz="1300" dirty="0">
+              <a:rPr lang="en" sz="1300">
                 <a:latin typeface="Calibri"/>
                 <a:ea typeface="Calibri"/>
                 <a:cs typeface="Calibri"/>
@@ -7640,7 +7399,7 @@
               </a:rPr>
             </a:br>
             <a:r>
-              <a:rPr lang="en" sz="1300" b="1" dirty="0">
+              <a:rPr lang="en" sz="1300" b="1">
                 <a:solidFill>
                   <a:srgbClr val="FF0000"/>
                 </a:solidFill>
@@ -7652,7 +7411,7 @@
               <a:t>GDPR</a:t>
             </a:r>
             <a:r>
-              <a:rPr lang="en" sz="1300" dirty="0">
+              <a:rPr lang="en" sz="1300">
                 <a:latin typeface="Calibri"/>
                 <a:ea typeface="Calibri"/>
                 <a:cs typeface="Calibri"/>
@@ -7661,7 +7420,7 @@
               <a:t> = General Data Protection Regulation - </a:t>
             </a:r>
             <a:r>
-              <a:rPr lang="en" sz="1300" u="sng" dirty="0">
+              <a:rPr lang="en" sz="1300" u="sng">
                 <a:solidFill>
                   <a:schemeClr val="hlink"/>
                 </a:solidFill>
@@ -7674,7 +7433,7 @@
               <a:t>https://gdpr-info.eu</a:t>
             </a:r>
             <a:r>
-              <a:rPr lang="en" sz="1300" dirty="0">
+              <a:rPr lang="en" sz="1300">
                 <a:latin typeface="Calibri"/>
                 <a:ea typeface="Calibri"/>
                 <a:cs typeface="Calibri"/>
@@ -7683,7 +7442,7 @@
               <a:t> </a:t>
             </a:r>
             <a:br>
-              <a:rPr lang="en" sz="1300" dirty="0">
+              <a:rPr lang="en" sz="1300">
                 <a:latin typeface="Calibri"/>
                 <a:ea typeface="Calibri"/>
                 <a:cs typeface="Calibri"/>
@@ -7691,7 +7450,7 @@
               </a:rPr>
             </a:br>
             <a:r>
-              <a:rPr lang="en" sz="1300" b="1" dirty="0">
+              <a:rPr lang="en" sz="1300" b="1">
                 <a:solidFill>
                   <a:srgbClr val="FF0000"/>
                 </a:solidFill>
@@ -7703,7 +7462,7 @@
               <a:t>CCPA</a:t>
             </a:r>
             <a:r>
-              <a:rPr lang="en" sz="1300" dirty="0">
+              <a:rPr lang="en" sz="1300">
                 <a:latin typeface="Calibri"/>
                 <a:ea typeface="Calibri"/>
                 <a:cs typeface="Calibri"/>
@@ -7712,7 +7471,7 @@
               <a:t> = California Consumer Privacy Act - </a:t>
             </a:r>
             <a:r>
-              <a:rPr lang="en" sz="1300" u="sng" dirty="0">
+              <a:rPr lang="en" sz="1300" u="sng">
                 <a:solidFill>
                   <a:schemeClr val="hlink"/>
                 </a:solidFill>
@@ -7725,7 +7484,7 @@
               <a:t>https://oag.ca.gov/privacy/ccpa</a:t>
             </a:r>
             <a:r>
-              <a:rPr lang="en" sz="1300" dirty="0">
+              <a:rPr lang="en" sz="1300">
                 <a:latin typeface="Calibri"/>
                 <a:ea typeface="Calibri"/>
                 <a:cs typeface="Calibri"/>
@@ -7734,7 +7493,7 @@
               <a:t> </a:t>
             </a:r>
             <a:br>
-              <a:rPr lang="en" sz="1300" dirty="0">
+              <a:rPr lang="en" sz="1300">
                 <a:latin typeface="Calibri"/>
                 <a:ea typeface="Calibri"/>
                 <a:cs typeface="Calibri"/>
@@ -7742,7 +7501,7 @@
               </a:rPr>
             </a:br>
             <a:r>
-              <a:rPr lang="en-US" sz="1300" b="1" dirty="0">
+              <a:rPr lang="en" sz="1300" b="1">
                 <a:solidFill>
                   <a:srgbClr val="FF0000"/>
                 </a:solidFill>
@@ -7751,29 +7510,32 @@
                 <a:cs typeface="Calibri"/>
                 <a:sym typeface="Calibri"/>
               </a:rPr>
-              <a:t>HIPAA</a:t>
+              <a:t>EU Artificial Intelligence Act</a:t>
             </a:r>
             <a:r>
-              <a:rPr lang="en-US" sz="1300" dirty="0">
+              <a:rPr lang="en" sz="1300">
                 <a:latin typeface="Calibri"/>
                 <a:ea typeface="Calibri"/>
                 <a:cs typeface="Calibri"/>
                 <a:sym typeface="Calibri"/>
               </a:rPr>
-              <a:t> = Health Insurance Portability and Accountability Act of 1996 - </a:t>
+              <a:t> - </a:t>
             </a:r>
             <a:r>
-              <a:rPr lang="en-US" sz="1300" dirty="0">
+              <a:rPr lang="en" sz="1300" u="sng">
+                <a:solidFill>
+                  <a:schemeClr val="hlink"/>
+                </a:solidFill>
                 <a:latin typeface="Calibri"/>
                 <a:ea typeface="Calibri"/>
                 <a:cs typeface="Calibri"/>
                 <a:sym typeface="Calibri"/>
                 <a:hlinkClick r:id="rId5"/>
               </a:rPr>
-              <a:t>https://www.hhs.gov/hipaa</a:t>
+              <a:t>https://artificialintelligenceact.eu</a:t>
             </a:r>
             <a:r>
-              <a:rPr lang="en-US" sz="1300" dirty="0">
+              <a:rPr lang="en" sz="1300">
                 <a:latin typeface="Calibri"/>
                 <a:ea typeface="Calibri"/>
                 <a:cs typeface="Calibri"/>
@@ -7781,7 +7543,7 @@
               </a:rPr>
               <a:t> </a:t>
             </a:r>
-            <a:endParaRPr sz="1300" dirty="0">
+            <a:endParaRPr sz="1300">
               <a:latin typeface="Calibri"/>
               <a:ea typeface="Calibri"/>
               <a:cs typeface="Calibri"/>
@@ -7801,7 +7563,7 @@
               <a:buChar char="●"/>
             </a:pPr>
             <a:r>
-              <a:rPr lang="en" sz="1300" dirty="0">
+              <a:rPr lang="en" sz="1300">
                 <a:latin typeface="Calibri"/>
                 <a:ea typeface="Calibri"/>
                 <a:cs typeface="Calibri"/>
@@ -7809,7 +7571,7 @@
               </a:rPr>
               <a:t>Malicious scenarios: Adversarial testing (have someone try to "break" it); Insurance assessment; Buy specialized insurance for AI-related risks</a:t>
             </a:r>
-            <a:endParaRPr sz="1300" dirty="0">
+            <a:endParaRPr sz="1300">
               <a:latin typeface="Calibri"/>
               <a:ea typeface="Calibri"/>
               <a:cs typeface="Calibri"/>
@@ -7829,7 +7591,7 @@
               <a:buChar char="●"/>
             </a:pPr>
             <a:r>
-              <a:rPr lang="en" sz="1300" dirty="0">
+              <a:rPr lang="en" sz="1300">
                 <a:latin typeface="Calibri"/>
                 <a:ea typeface="Calibri"/>
                 <a:cs typeface="Calibri"/>
@@ -7837,7 +7599,7 @@
               </a:rPr>
               <a:t>Rigorously test the LLM in various scenarios</a:t>
             </a:r>
-            <a:endParaRPr sz="1300" dirty="0">
+            <a:endParaRPr sz="1300">
               <a:latin typeface="Calibri"/>
               <a:ea typeface="Calibri"/>
               <a:cs typeface="Calibri"/>
@@ -7880,7 +7642,7 @@
         <p:spPr>
           <a:xfrm>
             <a:off x="72300" y="0"/>
-            <a:ext cx="4154700" cy="326400"/>
+            <a:ext cx="4499700" cy="326400"/>
           </a:xfrm>
           <a:prstGeom prst="rect">
             <a:avLst/>
@@ -7915,7 +7677,7 @@
                 <a:cs typeface="Calibri"/>
                 <a:sym typeface="Calibri"/>
               </a:rPr>
-              <a:t>Frameworks for Controling AI Risks - 1</a:t>
+              <a:t>Frameworks for Controlling AI Risks - 1</a:t>
             </a:r>
             <a:endParaRPr sz="2000" b="1">
               <a:latin typeface="Calibri"/>
@@ -8714,7 +8476,20 @@
                 <a:sym typeface="Calibri"/>
                 <a:hlinkClick r:id="rId11"/>
               </a:rPr>
-              <a:t>https://www.nist.gov/itl/ai-risk-management-framework</a:t>
+              <a:t>h</a:t>
+            </a:r>
+            <a:r>
+              <a:rPr lang="en" sz="1300" u="sng">
+                <a:solidFill>
+                  <a:schemeClr val="hlink"/>
+                </a:solidFill>
+                <a:latin typeface="Calibri"/>
+                <a:ea typeface="Calibri"/>
+                <a:cs typeface="Calibri"/>
+                <a:sym typeface="Calibri"/>
+                <a:hlinkClick r:id="rId11"/>
+              </a:rPr>
+              <a:t>ttps://www.nist.gov/itl/ai-risk-management-framework</a:t>
             </a:r>
             <a:endParaRPr sz="1300">
               <a:latin typeface="Calibri"/>
@@ -8813,7 +8588,7 @@
         </p:nvSpPr>
         <p:spPr>
           <a:xfrm>
-            <a:off x="1085175" y="1313500"/>
+            <a:off x="539225" y="717275"/>
             <a:ext cx="6510900" cy="2786100"/>
           </a:xfrm>
           <a:prstGeom prst="rect">
@@ -9329,14 +9104,14 @@
         </p:nvGraphicFramePr>
         <p:xfrm>
           <a:off x="244625" y="534213"/>
-          <a:ext cx="8654750" cy="4385707"/>
+          <a:ext cx="3000000" cy="3000000"/>
         </p:xfrm>
         <a:graphic>
           <a:graphicData uri="http://schemas.openxmlformats.org/drawingml/2006/table">
             <a:tbl>
               <a:tblPr>
                 <a:noFill/>
-                <a:tableStyleId>{A310FD3F-B1C8-4509-BF7B-F9E2075FF985}</a:tableStyleId>
+                <a:tableStyleId>{94905192-C7E4-47F2-8855-85AFB3B20384}</a:tableStyleId>
               </a:tblPr>
               <a:tblGrid>
                 <a:gridCol w="1870875">
@@ -9617,7 +9392,10 @@
                         <a:buNone/>
                       </a:pPr>
                       <a:r>
-                        <a:rPr lang="en" sz="1000">
+                        <a:rPr lang="en" sz="1000" b="1">
+                          <a:solidFill>
+                            <a:srgbClr val="FF0000"/>
+                          </a:solidFill>
                           <a:latin typeface="Calibri"/>
                           <a:ea typeface="Calibri"/>
                           <a:cs typeface="Calibri"/>
@@ -9625,7 +9403,10 @@
                         </a:rPr>
                         <a:t>PyRIT</a:t>
                       </a:r>
-                      <a:endParaRPr sz="1000">
+                      <a:endParaRPr sz="1000" b="1">
+                        <a:solidFill>
+                          <a:srgbClr val="FF0000"/>
+                        </a:solidFill>
                         <a:latin typeface="Calibri"/>
                         <a:ea typeface="Calibri"/>
                         <a:cs typeface="Calibri"/>
@@ -9867,7 +9648,10 @@
                         <a:buNone/>
                       </a:pPr>
                       <a:r>
-                        <a:rPr lang="en" sz="1000">
+                        <a:rPr lang="en" sz="1000" b="1">
+                          <a:solidFill>
+                            <a:srgbClr val="FF0000"/>
+                          </a:solidFill>
                           <a:latin typeface="Calibri"/>
                           <a:ea typeface="Calibri"/>
                           <a:cs typeface="Calibri"/>
@@ -9875,7 +9659,10 @@
                         </a:rPr>
                         <a:t>RAGAs</a:t>
                       </a:r>
-                      <a:endParaRPr sz="1000">
+                      <a:endParaRPr sz="1000" b="1">
+                        <a:solidFill>
+                          <a:srgbClr val="FF0000"/>
+                        </a:solidFill>
                         <a:latin typeface="Calibri"/>
                         <a:ea typeface="Calibri"/>
                         <a:cs typeface="Calibri"/>
@@ -10124,7 +9911,10 @@
                         <a:buNone/>
                       </a:pPr>
                       <a:r>
-                        <a:rPr lang="en" sz="1000">
+                        <a:rPr lang="en" sz="1000" b="1">
+                          <a:solidFill>
+                            <a:srgbClr val="FF0000"/>
+                          </a:solidFill>
                           <a:latin typeface="Calibri"/>
                           <a:ea typeface="Calibri"/>
                           <a:cs typeface="Calibri"/>
@@ -10132,7 +9922,10 @@
                         </a:rPr>
                         <a:t>HELM</a:t>
                       </a:r>
-                      <a:endParaRPr sz="1000">
+                      <a:endParaRPr sz="1000" b="1">
+                        <a:solidFill>
+                          <a:srgbClr val="FF0000"/>
+                        </a:solidFill>
                         <a:latin typeface="Calibri"/>
                         <a:ea typeface="Calibri"/>
                         <a:cs typeface="Calibri"/>
@@ -10375,7 +10168,10 @@
                         <a:buNone/>
                       </a:pPr>
                       <a:r>
-                        <a:rPr lang="en" sz="1000">
+                        <a:rPr lang="en" sz="1000" b="1">
+                          <a:solidFill>
+                            <a:srgbClr val="FF0000"/>
+                          </a:solidFill>
                           <a:latin typeface="Calibri"/>
                           <a:ea typeface="Calibri"/>
                           <a:cs typeface="Calibri"/>
@@ -10383,7 +10179,10 @@
                         </a:rPr>
                         <a:t>Aequitas</a:t>
                       </a:r>
-                      <a:endParaRPr sz="1000">
+                      <a:endParaRPr sz="1000" b="1">
+                        <a:solidFill>
+                          <a:srgbClr val="FF0000"/>
+                        </a:solidFill>
                         <a:latin typeface="Calibri"/>
                         <a:ea typeface="Calibri"/>
                         <a:cs typeface="Calibri"/>
@@ -12679,1049 +12478,6 @@
 </file>
 
 <file path=ppt/slides/slide7.xml><?xml version="1.0" encoding="utf-8"?>
-<p:sld xmlns:a="http://schemas.openxmlformats.org/drawingml/2006/main" xmlns:r="http://schemas.openxmlformats.org/officeDocument/2006/relationships" xmlns:p="http://schemas.openxmlformats.org/presentationml/2006/main">
-  <p:cSld>
-    <p:spTree>
-      <p:nvGrpSpPr>
-        <p:cNvPr id="1" name="Shape 60"/>
-        <p:cNvGrpSpPr/>
-        <p:nvPr/>
-      </p:nvGrpSpPr>
-      <p:grpSpPr>
-        <a:xfrm>
-          <a:off x="0" y="0"/>
-          <a:ext cx="0" cy="0"/>
-          <a:chOff x="0" y="0"/>
-          <a:chExt cx="0" cy="0"/>
-        </a:xfrm>
-      </p:grpSpPr>
-      <p:sp>
-        <p:nvSpPr>
-          <p:cNvPr id="61" name="Google Shape;61;p14"/>
-          <p:cNvSpPr txBox="1"/>
-          <p:nvPr/>
-        </p:nvSpPr>
-        <p:spPr>
-          <a:xfrm>
-            <a:off x="72300" y="0"/>
-            <a:ext cx="4932000" cy="326205"/>
-          </a:xfrm>
-          <a:prstGeom prst="rect">
-            <a:avLst/>
-          </a:prstGeom>
-          <a:noFill/>
-          <a:ln>
-            <a:noFill/>
-          </a:ln>
-        </p:spPr>
-        <p:txBody>
-          <a:bodyPr spcFirstLastPara="1" wrap="square" lIns="9125" tIns="9125" rIns="9125" bIns="9125" anchor="t" anchorCtr="0">
-            <a:spAutoFit/>
-          </a:bodyPr>
-          <a:lstStyle/>
-          <a:p>
-            <a:pPr marL="0" lvl="0" indent="0" algn="l" rtl="0">
-              <a:spcBef>
-                <a:spcPts val="0"/>
-              </a:spcBef>
-              <a:spcAft>
-                <a:spcPts val="0"/>
-              </a:spcAft>
-              <a:buNone/>
-            </a:pPr>
-            <a:r>
-              <a:rPr lang="en-US" sz="2000" b="1" dirty="0">
-                <a:solidFill>
-                  <a:schemeClr val="dk1"/>
-                </a:solidFill>
-                <a:latin typeface="Calibri"/>
-                <a:ea typeface="Calibri"/>
-                <a:cs typeface="Calibri"/>
-                <a:sym typeface="Calibri"/>
-              </a:rPr>
-              <a:t>Microsoft-365 Copilot Risk Mitigation</a:t>
-            </a:r>
-          </a:p>
-        </p:txBody>
-      </p:sp>
-      <p:sp>
-        <p:nvSpPr>
-          <p:cNvPr id="62" name="Google Shape;62;p14"/>
-          <p:cNvSpPr txBox="1"/>
-          <p:nvPr/>
-        </p:nvSpPr>
-        <p:spPr>
-          <a:xfrm>
-            <a:off x="258200" y="508575"/>
-            <a:ext cx="4256650" cy="2785348"/>
-          </a:xfrm>
-          <a:prstGeom prst="rect">
-            <a:avLst/>
-          </a:prstGeom>
-          <a:solidFill>
-            <a:srgbClr val="FFF2CC"/>
-          </a:solidFill>
-          <a:ln w="9525" cap="flat" cmpd="sng">
-            <a:solidFill>
-              <a:srgbClr val="FF0000"/>
-            </a:solidFill>
-            <a:prstDash val="solid"/>
-            <a:round/>
-            <a:headEnd type="none" w="sm" len="sm"/>
-            <a:tailEnd type="none" w="sm" len="sm"/>
-          </a:ln>
-        </p:spPr>
-        <p:txBody>
-          <a:bodyPr spcFirstLastPara="1" wrap="square" lIns="91425" tIns="91425" rIns="91425" bIns="91425" anchor="t" anchorCtr="0">
-            <a:spAutoFit/>
-          </a:bodyPr>
-          <a:lstStyle/>
-          <a:p>
-            <a:pPr marL="0" lvl="0" indent="0" algn="l" rtl="0">
-              <a:spcBef>
-                <a:spcPts val="0"/>
-              </a:spcBef>
-              <a:spcAft>
-                <a:spcPts val="0"/>
-              </a:spcAft>
-              <a:buNone/>
-            </a:pPr>
-            <a:r>
-              <a:rPr lang="en-US" sz="1300" b="1" dirty="0">
-                <a:solidFill>
-                  <a:srgbClr val="FF0000"/>
-                </a:solidFill>
-                <a:latin typeface="Calibri"/>
-                <a:ea typeface="Calibri"/>
-                <a:cs typeface="Calibri"/>
-                <a:sym typeface="Calibri"/>
-              </a:rPr>
-              <a:t>Microsoft Graph </a:t>
-            </a:r>
-          </a:p>
-          <a:p>
-            <a:pPr marL="0" lvl="0" indent="0" algn="l" rtl="0">
-              <a:spcBef>
-                <a:spcPts val="0"/>
-              </a:spcBef>
-              <a:spcAft>
-                <a:spcPts val="0"/>
-              </a:spcAft>
-              <a:buNone/>
-            </a:pPr>
-            <a:r>
-              <a:rPr lang="en-US" sz="1300" dirty="0">
-                <a:latin typeface="Calibri"/>
-                <a:ea typeface="Calibri"/>
-                <a:cs typeface="Calibri"/>
-                <a:sym typeface="Calibri"/>
-              </a:rPr>
-              <a:t>- </a:t>
-            </a:r>
-            <a:r>
-              <a:rPr lang="en-US" sz="1300" dirty="0">
-                <a:latin typeface="Calibri"/>
-                <a:ea typeface="Calibri"/>
-                <a:cs typeface="Calibri"/>
-                <a:sym typeface="Calibri"/>
-                <a:hlinkClick r:id="rId3"/>
-              </a:rPr>
-              <a:t>https://developer.microsoft.com/en-us/graph</a:t>
-            </a:r>
-            <a:r>
-              <a:rPr lang="en-US" sz="1300" dirty="0">
-                <a:latin typeface="Calibri"/>
-                <a:ea typeface="Calibri"/>
-                <a:cs typeface="Calibri"/>
-                <a:sym typeface="Calibri"/>
-              </a:rPr>
-              <a:t> </a:t>
-            </a:r>
-          </a:p>
-          <a:p>
-            <a:pPr marL="0" lvl="0" indent="0" algn="l" rtl="0">
-              <a:spcBef>
-                <a:spcPts val="0"/>
-              </a:spcBef>
-              <a:spcAft>
-                <a:spcPts val="0"/>
-              </a:spcAft>
-              <a:buNone/>
-            </a:pPr>
-            <a:r>
-              <a:rPr lang="en-US" sz="1300" dirty="0">
-                <a:latin typeface="Calibri"/>
-                <a:ea typeface="Calibri"/>
-                <a:cs typeface="Calibri"/>
-                <a:sym typeface="Calibri"/>
-              </a:rPr>
-              <a:t>- </a:t>
-            </a:r>
-            <a:r>
-              <a:rPr lang="en-US" sz="1300" dirty="0">
-                <a:latin typeface="Calibri"/>
-                <a:ea typeface="Calibri"/>
-                <a:cs typeface="Calibri"/>
-                <a:sym typeface="Calibri"/>
-                <a:hlinkClick r:id="rId4"/>
-              </a:rPr>
-              <a:t>https://learn.microsoft.com/en-us/graph/overview</a:t>
-            </a:r>
-            <a:r>
-              <a:rPr lang="en-US" sz="1300" dirty="0">
-                <a:latin typeface="Calibri"/>
-                <a:ea typeface="Calibri"/>
-                <a:cs typeface="Calibri"/>
-                <a:sym typeface="Calibri"/>
-              </a:rPr>
-              <a:t> </a:t>
-            </a:r>
-          </a:p>
-          <a:p>
-            <a:pPr marL="0" lvl="0" indent="0" algn="l" rtl="0">
-              <a:spcBef>
-                <a:spcPts val="0"/>
-              </a:spcBef>
-              <a:spcAft>
-                <a:spcPts val="0"/>
-              </a:spcAft>
-              <a:buNone/>
-            </a:pPr>
-            <a:r>
-              <a:rPr lang="en-US" sz="1300" dirty="0">
-                <a:latin typeface="Calibri"/>
-                <a:ea typeface="Calibri"/>
-                <a:cs typeface="Calibri"/>
-                <a:sym typeface="Calibri"/>
-              </a:rPr>
-              <a:t>Microsoft Graph is the </a:t>
-            </a:r>
-            <a:r>
-              <a:rPr lang="en-US" sz="1300" dirty="0" err="1">
-                <a:latin typeface="Calibri"/>
-                <a:ea typeface="Calibri"/>
-                <a:cs typeface="Calibri"/>
-                <a:sym typeface="Calibri"/>
-              </a:rPr>
-              <a:t>the</a:t>
-            </a:r>
-            <a:r>
-              <a:rPr lang="en-US" sz="1300" dirty="0">
-                <a:latin typeface="Calibri"/>
-                <a:ea typeface="Calibri"/>
-                <a:cs typeface="Calibri"/>
-                <a:sym typeface="Calibri"/>
-              </a:rPr>
-              <a:t> gateway to Microsoft-365 data.</a:t>
-            </a:r>
-          </a:p>
-          <a:p>
-            <a:pPr marL="0" lvl="0" indent="0" algn="l" rtl="0">
-              <a:spcBef>
-                <a:spcPts val="0"/>
-              </a:spcBef>
-              <a:spcAft>
-                <a:spcPts val="0"/>
-              </a:spcAft>
-              <a:buNone/>
-            </a:pPr>
-            <a:r>
-              <a:rPr lang="en-US" sz="1300" dirty="0">
-                <a:latin typeface="Calibri"/>
-                <a:ea typeface="Calibri"/>
-                <a:cs typeface="Calibri"/>
-                <a:sym typeface="Calibri"/>
-              </a:rPr>
-              <a:t>It is an API endpoint</a:t>
-            </a:r>
-          </a:p>
-          <a:p>
-            <a:pPr marL="0" lvl="0" indent="0" algn="l" rtl="0">
-              <a:spcBef>
-                <a:spcPts val="0"/>
-              </a:spcBef>
-              <a:spcAft>
-                <a:spcPts val="0"/>
-              </a:spcAft>
-              <a:buNone/>
-            </a:pPr>
-            <a:r>
-              <a:rPr lang="en-US" sz="1300" dirty="0">
-                <a:latin typeface="Calibri"/>
-                <a:ea typeface="Calibri"/>
-                <a:cs typeface="Calibri"/>
-                <a:sym typeface="Calibri"/>
-              </a:rPr>
-              <a:t>Data comes from Outlook, OneDrive, Teams, SharePoint, OneNote, excel, Azure Active Directory, and more ...</a:t>
-            </a:r>
-          </a:p>
-          <a:p>
-            <a:pPr marL="0" lvl="0" indent="0" algn="l" rtl="0">
-              <a:spcBef>
-                <a:spcPts val="0"/>
-              </a:spcBef>
-              <a:spcAft>
-                <a:spcPts val="0"/>
-              </a:spcAft>
-              <a:buNone/>
-            </a:pPr>
-            <a:r>
-              <a:rPr lang="en-US" sz="1300" dirty="0">
-                <a:latin typeface="Calibri"/>
-                <a:ea typeface="Calibri"/>
-                <a:cs typeface="Calibri"/>
-                <a:sym typeface="Calibri"/>
-              </a:rPr>
-              <a:t>Data is indexed for effective search.</a:t>
-            </a:r>
-          </a:p>
-          <a:p>
-            <a:pPr marL="0" lvl="0" indent="0" algn="l" rtl="0">
-              <a:spcBef>
-                <a:spcPts val="0"/>
-              </a:spcBef>
-              <a:spcAft>
-                <a:spcPts val="0"/>
-              </a:spcAft>
-              <a:buNone/>
-            </a:pPr>
-            <a:r>
-              <a:rPr lang="en-US" sz="1300" dirty="0">
-                <a:latin typeface="Calibri"/>
-                <a:ea typeface="Calibri"/>
-                <a:cs typeface="Calibri"/>
-                <a:sym typeface="Calibri"/>
-              </a:rPr>
-              <a:t>You can effectively search through all data of your organization with queries like “search for documents talking about keys”, …</a:t>
-            </a:r>
-          </a:p>
-          <a:p>
-            <a:pPr marL="0" lvl="0" indent="0" algn="l" rtl="0">
-              <a:spcBef>
-                <a:spcPts val="0"/>
-              </a:spcBef>
-              <a:spcAft>
-                <a:spcPts val="0"/>
-              </a:spcAft>
-              <a:buNone/>
-            </a:pPr>
-            <a:r>
-              <a:rPr lang="en-US" sz="1300" dirty="0">
-                <a:latin typeface="Calibri"/>
-                <a:ea typeface="Calibri"/>
-                <a:cs typeface="Calibri"/>
-                <a:sym typeface="Calibri"/>
-              </a:rPr>
-              <a:t>You need to do searches as all users to find problematic data.</a:t>
-            </a:r>
-          </a:p>
-        </p:txBody>
-      </p:sp>
-      <p:pic>
-        <p:nvPicPr>
-          <p:cNvPr id="1026" name="Picture 2" descr="What's new for Microsoft Graph Developers at Build 2017 - Microsoft 365  Developer Blog">
-            <a:extLst>
-              <a:ext uri="{FF2B5EF4-FFF2-40B4-BE49-F238E27FC236}">
-                <a16:creationId xmlns:a16="http://schemas.microsoft.com/office/drawing/2014/main" id="{1AFB0EA5-650D-D32C-18A6-7BDA14C4D5AA}"/>
-              </a:ext>
-            </a:extLst>
-          </p:cNvPr>
-          <p:cNvPicPr>
-            <a:picLocks noChangeAspect="1" noChangeArrowheads="1"/>
-          </p:cNvPicPr>
-          <p:nvPr/>
-        </p:nvPicPr>
-        <p:blipFill>
-          <a:blip r:embed="rId5" cstate="email">
-            <a:extLst>
-              <a:ext uri="{28A0092B-C50C-407E-A947-70E740481C1C}">
-                <a14:useLocalDpi xmlns:a14="http://schemas.microsoft.com/office/drawing/2010/main" val="0"/>
-              </a:ext>
-            </a:extLst>
-          </a:blip>
-          <a:srcRect/>
-          <a:stretch>
-            <a:fillRect/>
-          </a:stretch>
-        </p:blipFill>
-        <p:spPr bwMode="auto">
-          <a:xfrm>
-            <a:off x="5004300" y="1028699"/>
-            <a:ext cx="3760443" cy="1920875"/>
-          </a:xfrm>
-          <a:prstGeom prst="rect">
-            <a:avLst/>
-          </a:prstGeom>
-          <a:noFill/>
-          <a:extLst>
-            <a:ext uri="{909E8E84-426E-40DD-AFC4-6F175D3DCCD1}">
-              <a14:hiddenFill xmlns:a14="http://schemas.microsoft.com/office/drawing/2010/main">
-                <a:solidFill>
-                  <a:srgbClr val="FFFFFF"/>
-                </a:solidFill>
-              </a14:hiddenFill>
-            </a:ext>
-          </a:extLst>
-        </p:spPr>
-      </p:pic>
-      <p:sp>
-        <p:nvSpPr>
-          <p:cNvPr id="2" name="Google Shape;62;p14">
-            <a:extLst>
-              <a:ext uri="{FF2B5EF4-FFF2-40B4-BE49-F238E27FC236}">
-                <a16:creationId xmlns:a16="http://schemas.microsoft.com/office/drawing/2014/main" id="{9522146A-0BFC-7195-4A4E-F21B5F37A150}"/>
-              </a:ext>
-            </a:extLst>
-          </p:cNvPr>
-          <p:cNvSpPr txBox="1"/>
-          <p:nvPr/>
-        </p:nvSpPr>
-        <p:spPr>
-          <a:xfrm>
-            <a:off x="258200" y="3805918"/>
-            <a:ext cx="4256650" cy="846355"/>
-          </a:xfrm>
-          <a:prstGeom prst="rect">
-            <a:avLst/>
-          </a:prstGeom>
-          <a:solidFill>
-            <a:srgbClr val="FFF2CC"/>
-          </a:solidFill>
-          <a:ln w="9525" cap="flat" cmpd="sng">
-            <a:solidFill>
-              <a:srgbClr val="FF0000"/>
-            </a:solidFill>
-            <a:prstDash val="solid"/>
-            <a:round/>
-            <a:headEnd type="none" w="sm" len="sm"/>
-            <a:tailEnd type="none" w="sm" len="sm"/>
-          </a:ln>
-        </p:spPr>
-        <p:txBody>
-          <a:bodyPr spcFirstLastPara="1" wrap="square" lIns="91425" tIns="91425" rIns="91425" bIns="91425" anchor="t" anchorCtr="0">
-            <a:spAutoFit/>
-          </a:bodyPr>
-          <a:lstStyle/>
-          <a:p>
-            <a:r>
-              <a:rPr lang="en-US" sz="1300" b="1" dirty="0">
-                <a:solidFill>
-                  <a:srgbClr val="FF0000"/>
-                </a:solidFill>
-                <a:latin typeface="Calibri"/>
-                <a:cs typeface="Calibri"/>
-                <a:sym typeface="Calibri"/>
-              </a:rPr>
-              <a:t>Microsoft Security Copilot</a:t>
-            </a:r>
-          </a:p>
-          <a:p>
-            <a:pPr marL="285750" lvl="0" indent="-285750" algn="l" rtl="0">
-              <a:spcBef>
-                <a:spcPts val="0"/>
-              </a:spcBef>
-              <a:spcAft>
-                <a:spcPts val="0"/>
-              </a:spcAft>
-              <a:buFont typeface="Arial" panose="020B0604020202020204" pitchFamily="34" charset="0"/>
-              <a:buChar char="•"/>
-            </a:pPr>
-            <a:r>
-              <a:rPr lang="en-US" sz="1000" dirty="0">
-                <a:latin typeface="Calibri"/>
-                <a:ea typeface="Calibri"/>
-                <a:cs typeface="Calibri"/>
-                <a:sym typeface="Calibri"/>
-                <a:hlinkClick r:id="rId6"/>
-              </a:rPr>
-              <a:t>https://www.microsoft.com/en-us/security/business/ai-machine-learning/microsoft-security-copilot</a:t>
-            </a:r>
-            <a:r>
-              <a:rPr lang="en-US" sz="1000" dirty="0">
-                <a:latin typeface="Calibri"/>
-                <a:ea typeface="Calibri"/>
-                <a:cs typeface="Calibri"/>
-                <a:sym typeface="Calibri"/>
-              </a:rPr>
-              <a:t> </a:t>
-            </a:r>
-          </a:p>
-          <a:p>
-            <a:pPr marL="285750" lvl="0" indent="-285750" algn="l" rtl="0">
-              <a:spcBef>
-                <a:spcPts val="0"/>
-              </a:spcBef>
-              <a:spcAft>
-                <a:spcPts val="0"/>
-              </a:spcAft>
-              <a:buFont typeface="Arial" panose="020B0604020202020204" pitchFamily="34" charset="0"/>
-              <a:buChar char="•"/>
-            </a:pPr>
-            <a:r>
-              <a:rPr lang="en-US" sz="1000" dirty="0">
-                <a:latin typeface="Calibri"/>
-                <a:ea typeface="Calibri"/>
-                <a:cs typeface="Calibri"/>
-                <a:sym typeface="Calibri"/>
-                <a:hlinkClick r:id="rId7"/>
-              </a:rPr>
-              <a:t>https://www.youtube.com/watch?v=0lg_derTkaM</a:t>
-            </a:r>
-            <a:r>
-              <a:rPr lang="en-US" sz="1000" dirty="0">
-                <a:latin typeface="Calibri"/>
-                <a:ea typeface="Calibri"/>
-                <a:cs typeface="Calibri"/>
-                <a:sym typeface="Calibri"/>
-              </a:rPr>
-              <a:t> </a:t>
-            </a:r>
-          </a:p>
-        </p:txBody>
-      </p:sp>
-      <p:pic>
-        <p:nvPicPr>
-          <p:cNvPr id="4" name="Picture 2" descr="What Is Microsoft Security Copilot? A Comprehensive Guide">
-            <a:extLst>
-              <a:ext uri="{FF2B5EF4-FFF2-40B4-BE49-F238E27FC236}">
-                <a16:creationId xmlns:a16="http://schemas.microsoft.com/office/drawing/2014/main" id="{B57B9A35-4FD0-A049-B496-209A47351B4A}"/>
-              </a:ext>
-            </a:extLst>
-          </p:cNvPr>
-          <p:cNvPicPr>
-            <a:picLocks noChangeAspect="1" noChangeArrowheads="1"/>
-          </p:cNvPicPr>
-          <p:nvPr/>
-        </p:nvPicPr>
-        <p:blipFill>
-          <a:blip r:embed="rId8">
-            <a:extLst>
-              <a:ext uri="{28A0092B-C50C-407E-A947-70E740481C1C}">
-                <a14:useLocalDpi xmlns:a14="http://schemas.microsoft.com/office/drawing/2010/main" val="0"/>
-              </a:ext>
-            </a:extLst>
-          </a:blip>
-          <a:srcRect/>
-          <a:stretch>
-            <a:fillRect/>
-          </a:stretch>
-        </p:blipFill>
-        <p:spPr bwMode="auto">
-          <a:xfrm>
-            <a:off x="5345113" y="3519482"/>
-            <a:ext cx="3228975" cy="1419225"/>
-          </a:xfrm>
-          <a:prstGeom prst="rect">
-            <a:avLst/>
-          </a:prstGeom>
-          <a:noFill/>
-          <a:extLst>
-            <a:ext uri="{909E8E84-426E-40DD-AFC4-6F175D3DCCD1}">
-              <a14:hiddenFill xmlns:a14="http://schemas.microsoft.com/office/drawing/2010/main">
-                <a:solidFill>
-                  <a:srgbClr val="FFFFFF"/>
-                </a:solidFill>
-              </a14:hiddenFill>
-            </a:ext>
-          </a:extLst>
-        </p:spPr>
-      </p:pic>
-    </p:spTree>
-    <p:extLst>
-      <p:ext uri="{BB962C8B-B14F-4D97-AF65-F5344CB8AC3E}">
-        <p14:creationId xmlns:p14="http://schemas.microsoft.com/office/powerpoint/2010/main" val="2531143623"/>
-      </p:ext>
-    </p:extLst>
-  </p:cSld>
-  <p:clrMapOvr>
-    <a:masterClrMapping/>
-  </p:clrMapOvr>
-</p:sld>
-</file>
-
-<file path=ppt/slides/slide8.xml><?xml version="1.0" encoding="utf-8"?>
-<p:sld xmlns:a="http://schemas.openxmlformats.org/drawingml/2006/main" xmlns:r="http://schemas.openxmlformats.org/officeDocument/2006/relationships" xmlns:p="http://schemas.openxmlformats.org/presentationml/2006/main">
-  <p:cSld>
-    <p:spTree>
-      <p:nvGrpSpPr>
-        <p:cNvPr id="1" name="Shape 60"/>
-        <p:cNvGrpSpPr/>
-        <p:nvPr/>
-      </p:nvGrpSpPr>
-      <p:grpSpPr>
-        <a:xfrm>
-          <a:off x="0" y="0"/>
-          <a:ext cx="0" cy="0"/>
-          <a:chOff x="0" y="0"/>
-          <a:chExt cx="0" cy="0"/>
-        </a:xfrm>
-      </p:grpSpPr>
-      <p:sp>
-        <p:nvSpPr>
-          <p:cNvPr id="61" name="Google Shape;61;p14"/>
-          <p:cNvSpPr txBox="1"/>
-          <p:nvPr/>
-        </p:nvSpPr>
-        <p:spPr>
-          <a:xfrm>
-            <a:off x="72300" y="0"/>
-            <a:ext cx="4932000" cy="326205"/>
-          </a:xfrm>
-          <a:prstGeom prst="rect">
-            <a:avLst/>
-          </a:prstGeom>
-          <a:noFill/>
-          <a:ln>
-            <a:noFill/>
-          </a:ln>
-        </p:spPr>
-        <p:txBody>
-          <a:bodyPr spcFirstLastPara="1" wrap="square" lIns="9125" tIns="9125" rIns="9125" bIns="9125" anchor="t" anchorCtr="0">
-            <a:spAutoFit/>
-          </a:bodyPr>
-          <a:lstStyle/>
-          <a:p>
-            <a:pPr marL="0" lvl="0" indent="0" algn="l" rtl="0">
-              <a:spcBef>
-                <a:spcPts val="0"/>
-              </a:spcBef>
-              <a:spcAft>
-                <a:spcPts val="0"/>
-              </a:spcAft>
-              <a:buNone/>
-            </a:pPr>
-            <a:r>
-              <a:rPr lang="en-US" sz="2000" b="1" dirty="0" err="1">
-                <a:solidFill>
-                  <a:schemeClr val="dk1"/>
-                </a:solidFill>
-                <a:latin typeface="Calibri"/>
-                <a:ea typeface="Calibri"/>
-                <a:cs typeface="Calibri"/>
-                <a:sym typeface="Calibri"/>
-              </a:rPr>
-              <a:t>Moveworks</a:t>
-            </a:r>
-            <a:r>
-              <a:rPr lang="en-US" sz="2000" b="1" dirty="0">
-                <a:solidFill>
-                  <a:schemeClr val="dk1"/>
-                </a:solidFill>
-                <a:latin typeface="Calibri"/>
-                <a:ea typeface="Calibri"/>
-                <a:cs typeface="Calibri"/>
-                <a:sym typeface="Calibri"/>
-              </a:rPr>
-              <a:t> Copilot works with Microsoft</a:t>
-            </a:r>
-          </a:p>
-        </p:txBody>
-      </p:sp>
-      <p:sp>
-        <p:nvSpPr>
-          <p:cNvPr id="62" name="Google Shape;62;p14"/>
-          <p:cNvSpPr txBox="1"/>
-          <p:nvPr/>
-        </p:nvSpPr>
-        <p:spPr>
-          <a:xfrm>
-            <a:off x="258200" y="508575"/>
-            <a:ext cx="4256650" cy="4185731"/>
-          </a:xfrm>
-          <a:prstGeom prst="rect">
-            <a:avLst/>
-          </a:prstGeom>
-          <a:solidFill>
-            <a:srgbClr val="FFF2CC"/>
-          </a:solidFill>
-          <a:ln w="9525" cap="flat" cmpd="sng">
-            <a:solidFill>
-              <a:srgbClr val="FF0000"/>
-            </a:solidFill>
-            <a:prstDash val="solid"/>
-            <a:round/>
-            <a:headEnd type="none" w="sm" len="sm"/>
-            <a:tailEnd type="none" w="sm" len="sm"/>
-          </a:ln>
-        </p:spPr>
-        <p:txBody>
-          <a:bodyPr spcFirstLastPara="1" wrap="square" lIns="91425" tIns="91425" rIns="91425" bIns="91425" anchor="t" anchorCtr="0">
-            <a:spAutoFit/>
-          </a:bodyPr>
-          <a:lstStyle/>
-          <a:p>
-            <a:pPr marL="0" lvl="0" indent="0" algn="l" rtl="0">
-              <a:spcBef>
-                <a:spcPts val="0"/>
-              </a:spcBef>
-              <a:spcAft>
-                <a:spcPts val="0"/>
-              </a:spcAft>
-              <a:buNone/>
-            </a:pPr>
-            <a:r>
-              <a:rPr lang="en-US" sz="1300" dirty="0" err="1">
-                <a:solidFill>
-                  <a:schemeClr val="tx1"/>
-                </a:solidFill>
-                <a:latin typeface="Calibri"/>
-                <a:ea typeface="Calibri"/>
-                <a:cs typeface="Calibri"/>
-                <a:sym typeface="Calibri"/>
-              </a:rPr>
-              <a:t>Moveworks</a:t>
-            </a:r>
-            <a:r>
-              <a:rPr lang="en-US" sz="1300" dirty="0">
-                <a:solidFill>
-                  <a:schemeClr val="tx1"/>
-                </a:solidFill>
-                <a:latin typeface="Calibri"/>
-                <a:ea typeface="Calibri"/>
-                <a:cs typeface="Calibri"/>
-                <a:sym typeface="Calibri"/>
-              </a:rPr>
-              <a:t> Copilot </a:t>
-            </a:r>
-            <a:r>
-              <a:rPr lang="en-US" sz="1300" dirty="0">
-                <a:solidFill>
-                  <a:schemeClr val="tx1"/>
-                </a:solidFill>
-                <a:latin typeface="Calibri"/>
-                <a:ea typeface="Calibri"/>
-                <a:cs typeface="Calibri"/>
-                <a:sym typeface="Calibri"/>
-                <a:hlinkClick r:id="rId3"/>
-              </a:rPr>
-              <a:t>–</a:t>
-            </a:r>
-            <a:r>
-              <a:rPr lang="en-US" sz="1300" dirty="0">
-                <a:solidFill>
-                  <a:schemeClr val="tx1"/>
-                </a:solidFill>
-                <a:latin typeface="Calibri"/>
-                <a:ea typeface="Calibri"/>
-                <a:cs typeface="Calibri"/>
-                <a:sym typeface="Calibri"/>
-              </a:rPr>
-              <a:t> works with Microsoft-365 apps and data</a:t>
-            </a:r>
-          </a:p>
-          <a:p>
-            <a:pPr marL="0" lvl="0" indent="0" algn="l" rtl="0">
-              <a:spcBef>
-                <a:spcPts val="0"/>
-              </a:spcBef>
-              <a:spcAft>
-                <a:spcPts val="0"/>
-              </a:spcAft>
-              <a:buNone/>
-            </a:pPr>
-            <a:endParaRPr lang="en-US" sz="1300" dirty="0">
-              <a:solidFill>
-                <a:schemeClr val="tx1"/>
-              </a:solidFill>
-              <a:latin typeface="Calibri"/>
-              <a:ea typeface="Calibri"/>
-              <a:cs typeface="Calibri"/>
-              <a:sym typeface="Calibri"/>
-              <a:hlinkClick r:id="rId3"/>
-            </a:endParaRPr>
-          </a:p>
-          <a:p>
-            <a:pPr marL="0" lvl="0" indent="0" algn="l" rtl="0">
-              <a:spcBef>
-                <a:spcPts val="0"/>
-              </a:spcBef>
-              <a:spcAft>
-                <a:spcPts val="0"/>
-              </a:spcAft>
-              <a:buNone/>
-            </a:pPr>
-            <a:r>
-              <a:rPr lang="en-US" sz="1300" dirty="0">
-                <a:solidFill>
-                  <a:schemeClr val="tx1"/>
-                </a:solidFill>
-                <a:latin typeface="Calibri"/>
-                <a:ea typeface="Calibri"/>
-                <a:cs typeface="Calibri"/>
-                <a:sym typeface="Calibri"/>
-                <a:hlinkClick r:id="rId3"/>
-              </a:rPr>
-              <a:t>https://www.moveworks.com/us/en/resources/blog/ai-security-for-a-next-gen-copilot</a:t>
-            </a:r>
-            <a:r>
-              <a:rPr lang="en-US" sz="1300" dirty="0">
-                <a:solidFill>
-                  <a:schemeClr val="tx1"/>
-                </a:solidFill>
-                <a:latin typeface="Calibri"/>
-                <a:ea typeface="Calibri"/>
-                <a:cs typeface="Calibri"/>
-                <a:sym typeface="Calibri"/>
-              </a:rPr>
-              <a:t> </a:t>
-            </a:r>
-          </a:p>
-          <a:p>
-            <a:pPr marL="0" lvl="0" indent="0" algn="l" rtl="0">
-              <a:spcBef>
-                <a:spcPts val="0"/>
-              </a:spcBef>
-              <a:spcAft>
-                <a:spcPts val="0"/>
-              </a:spcAft>
-              <a:buNone/>
-            </a:pPr>
-            <a:endParaRPr lang="en-US" sz="1300" dirty="0">
-              <a:solidFill>
-                <a:schemeClr val="tx1"/>
-              </a:solidFill>
-              <a:latin typeface="Calibri"/>
-              <a:ea typeface="Calibri"/>
-              <a:cs typeface="Calibri"/>
-              <a:sym typeface="Calibri"/>
-            </a:endParaRPr>
-          </a:p>
-          <a:p>
-            <a:pPr marL="0" lvl="0" indent="0" algn="l" rtl="0">
-              <a:spcBef>
-                <a:spcPts val="0"/>
-              </a:spcBef>
-              <a:spcAft>
-                <a:spcPts val="0"/>
-              </a:spcAft>
-              <a:buNone/>
-            </a:pPr>
-            <a:r>
-              <a:rPr lang="en-US" sz="1300" dirty="0" err="1">
-                <a:solidFill>
-                  <a:schemeClr val="tx1"/>
-                </a:solidFill>
-                <a:latin typeface="Calibri"/>
-                <a:ea typeface="Calibri"/>
-                <a:cs typeface="Calibri"/>
-                <a:sym typeface="Calibri"/>
-              </a:rPr>
-              <a:t>Moveworks</a:t>
-            </a:r>
-            <a:r>
-              <a:rPr lang="en-US" sz="1300" dirty="0">
-                <a:solidFill>
-                  <a:schemeClr val="tx1"/>
-                </a:solidFill>
-                <a:latin typeface="Calibri"/>
-                <a:ea typeface="Calibri"/>
-                <a:cs typeface="Calibri"/>
-                <a:sym typeface="Calibri"/>
-              </a:rPr>
-              <a:t> Blog: All in on AI: 4 key learnings from Microsoft Build 2023: </a:t>
-            </a:r>
-            <a:r>
-              <a:rPr lang="en-US" sz="1300" dirty="0">
-                <a:solidFill>
-                  <a:schemeClr val="tx1"/>
-                </a:solidFill>
-                <a:latin typeface="Calibri"/>
-                <a:ea typeface="Calibri"/>
-                <a:cs typeface="Calibri"/>
-                <a:sym typeface="Calibri"/>
-                <a:hlinkClick r:id="rId4"/>
-              </a:rPr>
-              <a:t>https://www.moveworks.com/us/en/resources/blog/microsoft-build-2023-event-recap</a:t>
-            </a:r>
-            <a:r>
-              <a:rPr lang="en-US" sz="1300" dirty="0">
-                <a:solidFill>
-                  <a:schemeClr val="tx1"/>
-                </a:solidFill>
-                <a:latin typeface="Calibri"/>
-                <a:ea typeface="Calibri"/>
-                <a:cs typeface="Calibri"/>
-                <a:sym typeface="Calibri"/>
-              </a:rPr>
-              <a:t> </a:t>
-            </a:r>
-          </a:p>
-          <a:p>
-            <a:pPr marL="0" lvl="0" indent="0" algn="l" rtl="0">
-              <a:spcBef>
-                <a:spcPts val="0"/>
-              </a:spcBef>
-              <a:spcAft>
-                <a:spcPts val="0"/>
-              </a:spcAft>
-              <a:buNone/>
-            </a:pPr>
-            <a:endParaRPr lang="en-US" sz="1300" dirty="0">
-              <a:solidFill>
-                <a:schemeClr val="tx1"/>
-              </a:solidFill>
-              <a:latin typeface="Calibri"/>
-              <a:ea typeface="Calibri"/>
-              <a:cs typeface="Calibri"/>
-              <a:sym typeface="Calibri"/>
-            </a:endParaRPr>
-          </a:p>
-          <a:p>
-            <a:pPr marL="0" lvl="0" indent="0" algn="l" rtl="0">
-              <a:spcBef>
-                <a:spcPts val="0"/>
-              </a:spcBef>
-              <a:spcAft>
-                <a:spcPts val="0"/>
-              </a:spcAft>
-              <a:buNone/>
-            </a:pPr>
-            <a:r>
-              <a:rPr lang="en-US" sz="1300" dirty="0">
-                <a:solidFill>
-                  <a:schemeClr val="tx1"/>
-                </a:solidFill>
-                <a:latin typeface="Calibri"/>
-                <a:ea typeface="Calibri"/>
-                <a:cs typeface="Calibri"/>
-                <a:sym typeface="Calibri"/>
-              </a:rPr>
-              <a:t>Microsoft Blog: 3 ways </a:t>
-            </a:r>
-            <a:r>
-              <a:rPr lang="en-US" sz="1300" dirty="0" err="1">
-                <a:solidFill>
-                  <a:schemeClr val="tx1"/>
-                </a:solidFill>
-                <a:latin typeface="Calibri"/>
-                <a:ea typeface="Calibri"/>
-                <a:cs typeface="Calibri"/>
-                <a:sym typeface="Calibri"/>
-              </a:rPr>
-              <a:t>Moveworks</a:t>
-            </a:r>
-            <a:r>
-              <a:rPr lang="en-US" sz="1300" dirty="0">
-                <a:solidFill>
-                  <a:schemeClr val="tx1"/>
-                </a:solidFill>
-                <a:latin typeface="Calibri"/>
-                <a:ea typeface="Calibri"/>
-                <a:cs typeface="Calibri"/>
-                <a:sym typeface="Calibri"/>
-              </a:rPr>
-              <a:t> and Microsoft Teams use AI to improve employee productivity: </a:t>
-            </a:r>
-            <a:r>
-              <a:rPr lang="en-US" sz="1300" dirty="0">
-                <a:solidFill>
-                  <a:schemeClr val="tx1"/>
-                </a:solidFill>
-                <a:latin typeface="Calibri"/>
-                <a:ea typeface="Calibri"/>
-                <a:cs typeface="Calibri"/>
-                <a:sym typeface="Calibri"/>
-                <a:hlinkClick r:id="rId5"/>
-              </a:rPr>
-              <a:t>https://www.microsoft.com/en-us/microsoft-365/blog/2023/07/10/3-ways-moveworks-and-microsoft-teams-use-ai-to-improve-employee-productivity/</a:t>
-            </a:r>
-            <a:r>
-              <a:rPr lang="en-US" sz="1300" dirty="0">
-                <a:solidFill>
-                  <a:schemeClr val="tx1"/>
-                </a:solidFill>
-                <a:latin typeface="Calibri"/>
-                <a:ea typeface="Calibri"/>
-                <a:cs typeface="Calibri"/>
-                <a:sym typeface="Calibri"/>
-              </a:rPr>
-              <a:t> </a:t>
-            </a:r>
-          </a:p>
-          <a:p>
-            <a:pPr marL="0" lvl="0" indent="0" algn="l" rtl="0">
-              <a:spcBef>
-                <a:spcPts val="0"/>
-              </a:spcBef>
-              <a:spcAft>
-                <a:spcPts val="0"/>
-              </a:spcAft>
-              <a:buNone/>
-            </a:pPr>
-            <a:endParaRPr lang="en-US" sz="1300" dirty="0">
-              <a:solidFill>
-                <a:schemeClr val="tx1"/>
-              </a:solidFill>
-              <a:latin typeface="Calibri"/>
-              <a:ea typeface="Calibri"/>
-              <a:cs typeface="Calibri"/>
-              <a:sym typeface="Calibri"/>
-            </a:endParaRPr>
-          </a:p>
-          <a:p>
-            <a:pPr marL="0" lvl="0" indent="0" algn="l" rtl="0">
-              <a:spcBef>
-                <a:spcPts val="0"/>
-              </a:spcBef>
-              <a:spcAft>
-                <a:spcPts val="0"/>
-              </a:spcAft>
-              <a:buNone/>
-            </a:pPr>
-            <a:r>
-              <a:rPr lang="en-US" sz="1300" dirty="0">
-                <a:solidFill>
-                  <a:schemeClr val="tx1"/>
-                </a:solidFill>
-                <a:latin typeface="Calibri"/>
-                <a:ea typeface="Calibri"/>
-                <a:cs typeface="Calibri"/>
-                <a:sym typeface="Calibri"/>
-              </a:rPr>
-              <a:t>Microsoft Learn: Data, Privacy, and Security for Microsoft Copilot for Microsoft 365: </a:t>
-            </a:r>
-            <a:r>
-              <a:rPr lang="en-US" sz="1300" dirty="0">
-                <a:solidFill>
-                  <a:schemeClr val="tx1"/>
-                </a:solidFill>
-                <a:latin typeface="Calibri"/>
-                <a:ea typeface="Calibri"/>
-                <a:cs typeface="Calibri"/>
-                <a:sym typeface="Calibri"/>
-                <a:hlinkClick r:id="rId6"/>
-              </a:rPr>
-              <a:t>https://learn.microsoft.com/en-us/microsoft-365-copilot/microsoft-365-copilot-privacy</a:t>
-            </a:r>
-            <a:r>
-              <a:rPr lang="en-US" sz="1300" dirty="0">
-                <a:solidFill>
-                  <a:schemeClr val="tx1"/>
-                </a:solidFill>
-                <a:latin typeface="Calibri"/>
-                <a:ea typeface="Calibri"/>
-                <a:cs typeface="Calibri"/>
-                <a:sym typeface="Calibri"/>
-              </a:rPr>
-              <a:t> </a:t>
-            </a:r>
-          </a:p>
-        </p:txBody>
-      </p:sp>
-    </p:spTree>
-    <p:extLst>
-      <p:ext uri="{BB962C8B-B14F-4D97-AF65-F5344CB8AC3E}">
-        <p14:creationId xmlns:p14="http://schemas.microsoft.com/office/powerpoint/2010/main" val="3895372624"/>
-      </p:ext>
-    </p:extLst>
-  </p:cSld>
-  <p:clrMapOvr>
-    <a:masterClrMapping/>
-  </p:clrMapOvr>
-</p:sld>
-</file>
-
-<file path=ppt/slides/slide9.xml><?xml version="1.0" encoding="utf-8"?>
 <p:sld xmlns:a="http://schemas.openxmlformats.org/drawingml/2006/main" xmlns:r="http://schemas.openxmlformats.org/officeDocument/2006/relationships" xmlns:p="http://schemas.openxmlformats.org/presentationml/2006/main">
   <p:cSld>
     <p:spTree>
